--- a/docs/generated-output/eposter/P0053535_YUAN_Haoming_URIS_Showcase_2026.pptx
+++ b/docs/generated-output/eposter/P0053535_YUAN_Haoming_URIS_Showcase_2026.pptx
@@ -2,13 +2,13 @@
 <file path=ppt/presentation.xml><?xml version="1.0" encoding="utf-8"?>
 <p:presentation xmlns:p="http://schemas.openxmlformats.org/presentationml/2006/main">
   <p:sldMasterIdLst>
-    <p:sldMasterId xmlns:r="http://schemas.openxmlformats.org/officeDocument/2006/relationships" id="2147483648" r:id="Re96b06bbd4634462"/>
+    <p:sldMasterId xmlns:r="http://schemas.openxmlformats.org/officeDocument/2006/relationships" id="2147483648" r:id="Rfc0aee5dc7544bef"/>
   </p:sldMasterIdLst>
   <p:notesMasterIdLst>
-    <p:notesMasterId xmlns:r="http://schemas.openxmlformats.org/officeDocument/2006/relationships" r:id="Rc3ee761717a74474"/>
+    <p:notesMasterId xmlns:r="http://schemas.openxmlformats.org/officeDocument/2006/relationships" r:id="Rd1d68ce358ca45c7"/>
   </p:notesMasterIdLst>
   <p:sldIdLst>
-    <p:sldId xmlns:r="http://schemas.openxmlformats.org/officeDocument/2006/relationships" id="256" r:id="R98995a44042a43cf"/>
+    <p:sldId xmlns:r="http://schemas.openxmlformats.org/officeDocument/2006/relationships" id="256" r:id="R6e328e578a674ad6"/>
   </p:sldIdLst>
   <p:sldSz cx="10287000" cy="18288000"/>
   <p:notesSz cx="6858000" cy="9144000"/>
@@ -414,47 +414,7 @@
           </a:p>
           <a:p xmlns:a="http://schemas.openxmlformats.org/drawingml/2006/main">
             <a:r>
-              <a:t>- /Users/littleblueleo/Library/Containers/com.tencent.xinWeChat/Data/Documents/xwechat_files/wxid_th27ayixjr522_1e18/msg/file/2026-07/E-poster Guideline.pdf (mandatory format and required sections)</a:t>
-            </a:r>
-          </a:p>
-          <a:p xmlns:a="http://schemas.openxmlformats.org/drawingml/2006/main">
-            <a:r>
-              <a:t>- /Users/littleblueleo/Downloads/Eposter.pptx (official template structure and PolyU / Graduate School / CURI logos)</a:t>
-            </a:r>
-          </a:p>
-          <a:p xmlns:a="http://schemas.openxmlformats.org/drawingml/2006/main">
-            <a:r>
-              <a:t>- /Users/littleblueleo/Documents/ChatGPT/URIS/docs/Undergraduate Research and Innovation Scheme.pdf (registered title, project ID, student, departments, objectives and project context)</a:t>
-            </a:r>
-          </a:p>
-          <a:p xmlns:a="http://schemas.openxmlformats.org/drawingml/2006/main">
-            <a:r>
-              <a:t>- /Users/littleblueleo/Documents/ChatGPT/URIS/training/leakage_safe_yolov5/EXPERIMENT_RESULTS.md (dataset, test metrics, class metrics, training configuration, timing and resource use)</a:t>
-            </a:r>
-          </a:p>
-          <a:p xmlns:a="http://schemas.openxmlformats.org/drawingml/2006/main">
-            <a:r>
-              <a:t>- /Users/littleblueleo/Documents/ChatGPT/URIS/training/leakage_safe_yolov5/audit/verification.json (clean split counts and zero cross-split overlaps)</a:t>
-            </a:r>
-          </a:p>
-          <a:p xmlns:a="http://schemas.openxmlformats.org/drawingml/2006/main">
-            <a:r>
-              <a:t>- /Users/littleblueleo/Documents/ChatGPT/URIS/training/leakage_safe_yolov5/original_model_reference/results.csv (legacy validation artifact)</a:t>
-            </a:r>
-          </a:p>
-          <a:p xmlns:a="http://schemas.openxmlformats.org/drawingml/2006/main">
-            <a:r>
-              <a:t>- /Users/littleblueleo/Documents/ChatGPT/URIS/training/leakage_safe_yolov5/runs/full_clean_45e/results.csv and results.png (45-epoch training trajectory)</a:t>
-            </a:r>
-          </a:p>
-          <a:p xmlns:a="http://schemas.openxmlformats.org/drawingml/2006/main">
-            <a:r>
-              <a:t>- /Users/littleblueleo/Documents/ChatGPT/URIS/training/leakage_safe_yolov5/runs/full_clean_test/ (independent clean-test evaluation)</a:t>
-            </a:r>
-          </a:p>
-          <a:p xmlns:a="http://schemas.openxmlformats.org/drawingml/2006/main">
-            <a:r>
-              <a:t>- https://github.com/Llleeeo/Smoke-and-Fire-detection-model-and-implementation- (repository)</a:t>
+              <a:t>- GS CURI email, 13 Aug 2026: Department of Applied Physics (AP) retitled Department of Physics and Materials (PM); supervisor department updated accordingly.</a:t>
             </a:r>
           </a:p>
           <a:p xmlns:a="http://schemas.openxmlformats.org/drawingml/2006/main">
@@ -3605,17 +3565,17 @@
   </p:cSld>
   <p:clrMap bg1="lt1" tx1="dk1" bg2="lt2" tx2="dk2" accent1="accent1" accent2="accent2" accent3="accent3" accent4="accent4" accent5="accent5" accent6="accent6" hlink="hlink" folHlink="folHlink"/>
   <p:sldLayoutIdLst>
-    <p:sldLayoutId xmlns:r="http://schemas.openxmlformats.org/officeDocument/2006/relationships" id="2147483649" r:id="R1a9b0bb98b714fcd"/>
-    <p:sldLayoutId xmlns:r="http://schemas.openxmlformats.org/officeDocument/2006/relationships" id="2147483650" r:id="Rf58acf6d0d9847a1"/>
-    <p:sldLayoutId xmlns:r="http://schemas.openxmlformats.org/officeDocument/2006/relationships" id="2147483651" r:id="Rb7807025e17b4d79"/>
-    <p:sldLayoutId xmlns:r="http://schemas.openxmlformats.org/officeDocument/2006/relationships" id="2147483652" r:id="R4f8d9b5bdb0f49ca"/>
-    <p:sldLayoutId xmlns:r="http://schemas.openxmlformats.org/officeDocument/2006/relationships" id="2147483653" r:id="R729503c0c0f04e2d"/>
-    <p:sldLayoutId xmlns:r="http://schemas.openxmlformats.org/officeDocument/2006/relationships" id="2147483654" r:id="Rbbe1f60d1e4f4eb7"/>
-    <p:sldLayoutId xmlns:r="http://schemas.openxmlformats.org/officeDocument/2006/relationships" id="2147483655" r:id="R6828dcd932cc4289"/>
-    <p:sldLayoutId xmlns:r="http://schemas.openxmlformats.org/officeDocument/2006/relationships" id="2147483656" r:id="R1f6c8a97a0554f1d"/>
-    <p:sldLayoutId xmlns:r="http://schemas.openxmlformats.org/officeDocument/2006/relationships" id="2147483657" r:id="R41bc6d867f8f429c"/>
-    <p:sldLayoutId xmlns:r="http://schemas.openxmlformats.org/officeDocument/2006/relationships" id="2147483658" r:id="R400cebe7446c44d1"/>
-    <p:sldLayoutId xmlns:r="http://schemas.openxmlformats.org/officeDocument/2006/relationships" id="2147483659" r:id="R5224ad88351a429f"/>
+    <p:sldLayoutId xmlns:r="http://schemas.openxmlformats.org/officeDocument/2006/relationships" id="2147483649" r:id="R93282cfe0b484d38"/>
+    <p:sldLayoutId xmlns:r="http://schemas.openxmlformats.org/officeDocument/2006/relationships" id="2147483650" r:id="Rd4b7479cc2454265"/>
+    <p:sldLayoutId xmlns:r="http://schemas.openxmlformats.org/officeDocument/2006/relationships" id="2147483651" r:id="Rd11d6c242c984f5d"/>
+    <p:sldLayoutId xmlns:r="http://schemas.openxmlformats.org/officeDocument/2006/relationships" id="2147483652" r:id="R3f6e14b2489c4213"/>
+    <p:sldLayoutId xmlns:r="http://schemas.openxmlformats.org/officeDocument/2006/relationships" id="2147483653" r:id="Racbcc32557fb4a40"/>
+    <p:sldLayoutId xmlns:r="http://schemas.openxmlformats.org/officeDocument/2006/relationships" id="2147483654" r:id="R6fba9ecbfb6a40bf"/>
+    <p:sldLayoutId xmlns:r="http://schemas.openxmlformats.org/officeDocument/2006/relationships" id="2147483655" r:id="R1aa11cbd7dbb4f95"/>
+    <p:sldLayoutId xmlns:r="http://schemas.openxmlformats.org/officeDocument/2006/relationships" id="2147483656" r:id="R518530ee14bb44f3"/>
+    <p:sldLayoutId xmlns:r="http://schemas.openxmlformats.org/officeDocument/2006/relationships" id="2147483657" r:id="Reb004cfdf9e24a98"/>
+    <p:sldLayoutId xmlns:r="http://schemas.openxmlformats.org/officeDocument/2006/relationships" id="2147483658" r:id="R9e866195c8d64607"/>
+    <p:sldLayoutId xmlns:r="http://schemas.openxmlformats.org/officeDocument/2006/relationships" id="2147483659" r:id="R5eb4f9e3218f4f23"/>
   </p:sldLayoutIdLst>
   <p:txStyles>
     <p:titleStyle>
@@ -4282,8 +4242,8 @@
         </p:nvSpPr>
         <p:spPr>
           <a:xfrm xmlns:a="http://schemas.openxmlformats.org/drawingml/2006/main">
-            <a:off x="266700" y="1066800"/>
-            <a:ext cx="9753600" cy="952500"/>
+            <a:off x="266700" y="1009650"/>
+            <a:ext cx="9753600" cy="876300"/>
           </a:xfrm>
         </p:spPr>
         <p:txBody>
@@ -4297,25 +4257,25 @@
                 <a:spcPct val="94000"/>
               </a:lnSpc>
               <a:buNone/>
-              <a:defRPr sz="2363" b="1">
+              <a:defRPr sz="2550" b="1">
                 <a:solidFill>
                   <a:srgbClr val="17212B"/>
                 </a:solidFill>
-                <a:latin typeface="Arial"/>
-                <a:ea typeface="Arial"/>
-                <a:cs typeface="Arial"/>
-              </a:defRPr>
-            </a:pPr>
-            <a:r>
-              <a:rPr sz="2363" b="1">
+                <a:latin typeface="Times New Roman"/>
+                <a:ea typeface="Times New Roman"/>
+                <a:cs typeface="Times New Roman"/>
+              </a:defRPr>
+            </a:pPr>
+            <a:r>
+              <a:rPr sz="2550" b="1">
                 <a:solidFill>
                   <a:srgbClr val="17212B"/>
                 </a:solidFill>
-                <a:latin typeface="Arial"/>
-                <a:ea typeface="Arial"/>
-                <a:cs typeface="Arial"/>
-              </a:rPr>
-              <a:t>AI Fireguard: An AI-Driven Fire Prevention System</a:t>
+                <a:latin typeface="Times New Roman"/>
+                <a:ea typeface="Times New Roman"/>
+                <a:cs typeface="Times New Roman"/>
+              </a:rPr>
+              <a:t>Computer Vision Based Fire-Prone Objects Detection Device</a:t>
             </a:r>
             <a:endParaRPr sz="3000" b="1">
               <a:solidFill>
@@ -4329,25 +4289,25 @@
                 <a:spcPct val="94000"/>
               </a:lnSpc>
               <a:buNone/>
-              <a:defRPr sz="2363" b="1">
+              <a:defRPr sz="2550" b="1">
                 <a:solidFill>
                   <a:srgbClr val="17212B"/>
                 </a:solidFill>
-                <a:latin typeface="Arial"/>
-                <a:ea typeface="Arial"/>
-                <a:cs typeface="Arial"/>
-              </a:defRPr>
-            </a:pPr>
-            <a:r>
-              <a:rPr sz="2363" b="1">
+                <a:latin typeface="Times New Roman"/>
+                <a:ea typeface="Times New Roman"/>
+                <a:cs typeface="Times New Roman"/>
+              </a:defRPr>
+            </a:pPr>
+            <a:r>
+              <a:rPr sz="2550" b="1">
                 <a:solidFill>
                   <a:srgbClr val="17212B"/>
                 </a:solidFill>
-                <a:latin typeface="Arial"/>
-                <a:ea typeface="Arial"/>
-                <a:cs typeface="Arial"/>
-              </a:rPr>
-              <a:t>with Advanced Monitoring, Data Analytics and Computer Vision</a:t>
+                <a:latin typeface="Times New Roman"/>
+                <a:ea typeface="Times New Roman"/>
+                <a:cs typeface="Times New Roman"/>
+              </a:rPr>
+              <a:t>and Real-Time Escape Route Planning System</a:t>
             </a:r>
             <a:endParaRPr sz="3000" b="1">
               <a:solidFill>
@@ -4373,8 +4333,8 @@
         </p:nvSpPr>
         <p:spPr>
           <a:xfrm xmlns:a="http://schemas.openxmlformats.org/drawingml/2006/main">
-            <a:off x="342900" y="2057400"/>
-            <a:ext cx="9601200" cy="647700"/>
+            <a:off x="342900" y="1895475"/>
+            <a:ext cx="9601200" cy="590550"/>
           </a:xfrm>
           <a:prstGeom xmlns:a="http://schemas.openxmlformats.org/drawingml/2006/main" prst="rect">
             <a:avLst/>
@@ -4539,23 +4499,23 @@
               </a:spcBef>
               <a:buFontTx/>
               <a:buNone/>
-              <a:defRPr sz="1313" b="1">
-                <a:solidFill>
-                  <a:srgbClr val="34424F"/>
-                </a:solidFill>
-                <a:latin typeface="Arial"/>
-                <a:ea typeface="Arial"/>
-                <a:cs typeface="Arial"/>
-              </a:defRPr>
-            </a:pPr>
-            <a:r>
-              <a:rPr sz="1313" b="1">
-                <a:solidFill>
-                  <a:srgbClr val="34424F"/>
-                </a:solidFill>
-                <a:latin typeface="Arial"/>
-                <a:ea typeface="Arial"/>
-                <a:cs typeface="Arial"/>
+              <a:defRPr sz="1350" b="1">
+                <a:solidFill>
+                  <a:srgbClr val="34424F"/>
+                </a:solidFill>
+                <a:latin typeface="Times New Roman"/>
+                <a:ea typeface="Times New Roman"/>
+                <a:cs typeface="Times New Roman"/>
+              </a:defRPr>
+            </a:pPr>
+            <a:r>
+              <a:rPr sz="1350" b="1">
+                <a:solidFill>
+                  <a:srgbClr val="34424F"/>
+                </a:solidFill>
+                <a:latin typeface="Times New Roman"/>
+                <a:ea typeface="Times New Roman"/>
+                <a:cs typeface="Times New Roman"/>
               </a:rPr>
               <a:t>Student: YUAN Haoming | Department: DSAI</a:t>
             </a:r>
@@ -4570,25 +4530,25 @@
               </a:spcBef>
               <a:buFontTx/>
               <a:buNone/>
-              <a:defRPr sz="1313" b="1">
-                <a:solidFill>
-                  <a:srgbClr val="34424F"/>
-                </a:solidFill>
-                <a:latin typeface="Arial"/>
-                <a:ea typeface="Arial"/>
-                <a:cs typeface="Arial"/>
-              </a:defRPr>
-            </a:pPr>
-            <a:r>
-              <a:rPr sz="1313" b="1">
-                <a:solidFill>
-                  <a:srgbClr val="34424F"/>
-                </a:solidFill>
-                <a:latin typeface="Arial"/>
-                <a:ea typeface="Arial"/>
-                <a:cs typeface="Arial"/>
-              </a:rPr>
-              <a:t>Chief Supervisor: TSANG Yuen Hong | Department: AP | URIS P0053535 | TAG3</a:t>
+              <a:defRPr sz="1350" b="1">
+                <a:solidFill>
+                  <a:srgbClr val="34424F"/>
+                </a:solidFill>
+                <a:latin typeface="Times New Roman"/>
+                <a:ea typeface="Times New Roman"/>
+                <a:cs typeface="Times New Roman"/>
+              </a:defRPr>
+            </a:pPr>
+            <a:r>
+              <a:rPr sz="1350" b="1">
+                <a:solidFill>
+                  <a:srgbClr val="34424F"/>
+                </a:solidFill>
+                <a:latin typeface="Times New Roman"/>
+                <a:ea typeface="Times New Roman"/>
+                <a:cs typeface="Times New Roman"/>
+              </a:rPr>
+              <a:t>Chief Supervisor: TSANG Yuen Hong | Department: PM | URIS P0053535 | TAG3</a:t>
             </a:r>
             <a:endParaRPr sz="2200" b="1"/>
           </a:p>
@@ -4610,8 +4570,8 @@
         </p:nvSpPr>
         <p:spPr>
           <a:xfrm xmlns:a="http://schemas.openxmlformats.org/drawingml/2006/main">
-            <a:off x="381000" y="17716500"/>
-            <a:ext cx="9525000" cy="323850"/>
+            <a:off x="381000" y="17754600"/>
+            <a:ext cx="9525000" cy="285750"/>
           </a:xfrm>
           <a:prstGeom xmlns:a="http://schemas.openxmlformats.org/drawingml/2006/main" prst="rect">
             <a:avLst/>
@@ -4760,25 +4720,25 @@
                 <a:spcPct val="50000"/>
               </a:spcBef>
               <a:buNone/>
-              <a:defRPr sz="1088" b="1">
+              <a:defRPr sz="1125" b="1">
                 <a:solidFill>
                   <a:srgbClr val="65727D"/>
                 </a:solidFill>
-                <a:latin typeface="Arial"/>
-                <a:ea typeface="Arial"/>
-                <a:cs typeface="Arial"/>
-              </a:defRPr>
-            </a:pPr>
-            <a:r>
-              <a:rPr sz="1088" b="1">
+                <a:latin typeface="Times New Roman"/>
+                <a:ea typeface="Times New Roman"/>
+                <a:cs typeface="Times New Roman"/>
+              </a:defRPr>
+            </a:pPr>
+            <a:r>
+              <a:rPr sz="1125" b="1">
                 <a:solidFill>
                   <a:srgbClr val="65727D"/>
                 </a:solidFill>
-                <a:latin typeface="Arial"/>
-                <a:ea typeface="Arial"/>
-                <a:cs typeface="Arial"/>
-              </a:rPr>
-              <a:t>23099168D@connect.polyu.hk  |  Research prototype - complements, not replaces, certified fire-safety systems</a:t>
+                <a:latin typeface="Times New Roman"/>
+                <a:ea typeface="Times New Roman"/>
+                <a:cs typeface="Times New Roman"/>
+              </a:rPr>
+              <a:t>23099168D@connect.polyu.hk  |  Research prototype — complements, not replaces, certified fire-safety systems</a:t>
             </a:r>
             <a:endParaRPr sz="1600"/>
           </a:p>
@@ -4800,12 +4760,12 @@
         </p:nvSpPr>
         <p:spPr>
           <a:xfrm xmlns:a="http://schemas.openxmlformats.org/drawingml/2006/main">
-            <a:off x="228600" y="3524250"/>
-            <a:ext cx="4000500" cy="14001750"/>
+            <a:off x="209550" y="3209925"/>
+            <a:ext cx="3143250" cy="14354175"/>
           </a:xfrm>
           <a:prstGeom xmlns:a="http://schemas.openxmlformats.org/drawingml/2006/main" prst="roundRect">
             <a:avLst>
-              <a:gd name="adj" fmla="val 3810"/>
+              <a:gd name="adj" fmla="val 4242"/>
             </a:avLst>
           </a:prstGeom>
           <a:noFill xmlns:a="http://schemas.openxmlformats.org/drawingml/2006/main"/>
@@ -4970,12 +4930,12 @@
         </p:nvSpPr>
         <p:spPr>
           <a:xfrm xmlns:a="http://schemas.openxmlformats.org/drawingml/2006/main">
-            <a:off x="4457700" y="3524250"/>
-            <a:ext cx="5600700" cy="14001750"/>
+            <a:off x="3409950" y="3209925"/>
+            <a:ext cx="6667500" cy="14354175"/>
           </a:xfrm>
           <a:prstGeom xmlns:a="http://schemas.openxmlformats.org/drawingml/2006/main" prst="roundRect">
             <a:avLst>
-              <a:gd name="adj" fmla="val 2721"/>
+              <a:gd name="adj" fmla="val 2000"/>
             </a:avLst>
           </a:prstGeom>
           <a:noFill xmlns:a="http://schemas.openxmlformats.org/drawingml/2006/main"/>
@@ -5133,7 +5093,7 @@
           <p:nvPr/>
         </p:nvPicPr>
         <p:blipFill>
-          <a:blip xmlns:r="http://schemas.openxmlformats.org/officeDocument/2006/relationships" xmlns:a="http://schemas.openxmlformats.org/drawingml/2006/main" r:embed="Re1af849631e34573"/>
+          <a:blip xmlns:r="http://schemas.openxmlformats.org/officeDocument/2006/relationships" xmlns:a="http://schemas.openxmlformats.org/drawingml/2006/main" r:embed="Ra94a232882174671"/>
           <a:stretch xmlns:a="http://schemas.openxmlformats.org/drawingml/2006/main">
             <a:fillRect l="0" t="0" r="0" b="0"/>
           </a:stretch>
@@ -5157,7 +5117,7 @@
           <p:nvPr/>
         </p:nvPicPr>
         <p:blipFill>
-          <a:blip xmlns:r="http://schemas.openxmlformats.org/officeDocument/2006/relationships" xmlns:a="http://schemas.openxmlformats.org/drawingml/2006/main" r:embed="R1d4df5f82ca14cdd"/>
+          <a:blip xmlns:r="http://schemas.openxmlformats.org/officeDocument/2006/relationships" xmlns:a="http://schemas.openxmlformats.org/drawingml/2006/main" r:embed="R3c09a9759e7840d7"/>
           <a:stretch xmlns:a="http://schemas.openxmlformats.org/drawingml/2006/main">
             <a:fillRect l="0" t="0" r="0" b="0"/>
           </a:stretch>
@@ -5181,7 +5141,7 @@
           <p:nvPr/>
         </p:nvPicPr>
         <p:blipFill>
-          <a:blip xmlns:r="http://schemas.openxmlformats.org/officeDocument/2006/relationships" xmlns:a="http://schemas.openxmlformats.org/drawingml/2006/main" r:embed="R001982d6db404527"/>
+          <a:blip xmlns:r="http://schemas.openxmlformats.org/officeDocument/2006/relationships" xmlns:a="http://schemas.openxmlformats.org/drawingml/2006/main" r:embed="Rf5ed07303ac64b08"/>
           <a:stretch xmlns:a="http://schemas.openxmlformats.org/drawingml/2006/main">
             <a:fillRect l="0" t="0" r="0" b="0"/>
           </a:stretch>
@@ -5212,8 +5172,8 @@
         </p:nvSpPr>
         <p:spPr>
           <a:xfrm xmlns:a="http://schemas.openxmlformats.org/drawingml/2006/main">
-            <a:off x="438150" y="3705225"/>
-            <a:ext cx="3581400" cy="323850"/>
+            <a:off x="381000" y="3314700"/>
+            <a:ext cx="2800350" cy="323850"/>
           </a:xfrm>
           <a:prstGeom xmlns:a="http://schemas.openxmlformats.org/drawingml/2006/main" prst="rect">
             <a:avLst/>
@@ -5235,23 +5195,23 @@
                 <a:spcPct val="108000"/>
               </a:lnSpc>
               <a:buNone/>
-              <a:defRPr sz="1875" b="1" i="0">
+              <a:defRPr sz="2030" b="1" i="0">
                 <a:solidFill>
                   <a:srgbClr val="8E1F35"/>
                 </a:solidFill>
-                <a:latin typeface="Arial"/>
-                <a:ea typeface="Arial"/>
-                <a:cs typeface="Arial"/>
-              </a:defRPr>
-            </a:pPr>
-            <a:r>
-              <a:rPr sz="1875" b="1" i="0">
+                <a:latin typeface="Times New Roman"/>
+                <a:ea typeface="Times New Roman"/>
+                <a:cs typeface="Times New Roman"/>
+              </a:defRPr>
+            </a:pPr>
+            <a:r>
+              <a:rPr sz="2030" b="1" i="0">
                 <a:solidFill>
                   <a:srgbClr val="8E1F35"/>
                 </a:solidFill>
-                <a:latin typeface="Arial"/>
-                <a:ea typeface="Arial"/>
-                <a:cs typeface="Arial"/>
+                <a:latin typeface="Times New Roman"/>
+                <a:ea typeface="Times New Roman"/>
+                <a:cs typeface="Times New Roman"/>
               </a:rPr>
               <a:t>I. Introduction</a:t>
             </a:r>
@@ -5274,8 +5234,8 @@
         </p:nvSpPr>
         <p:spPr>
           <a:xfrm xmlns:a="http://schemas.openxmlformats.org/drawingml/2006/main">
-            <a:off x="438150" y="4048125"/>
-            <a:ext cx="3581400" cy="0"/>
+            <a:off x="381000" y="3657600"/>
+            <a:ext cx="2800350" cy="0"/>
           </a:xfrm>
           <a:prstGeom xmlns:a="http://schemas.openxmlformats.org/drawingml/2006/main" prst="line">
             <a:avLst/>
@@ -5305,8 +5265,8 @@
         </p:nvSpPr>
         <p:spPr>
           <a:xfrm xmlns:a="http://schemas.openxmlformats.org/drawingml/2006/main">
-            <a:off x="438150" y="4124325"/>
-            <a:ext cx="3581400" cy="838200"/>
+            <a:off x="381000" y="3714750"/>
+            <a:ext cx="2800350" cy="819150"/>
           </a:xfrm>
           <a:prstGeom xmlns:a="http://schemas.openxmlformats.org/drawingml/2006/main" prst="rect">
             <a:avLst/>
@@ -5318,7 +5278,7 @@
           </a:ln>
         </p:spPr>
         <p:txBody>
-          <a:bodyPr xmlns:a="http://schemas.openxmlformats.org/drawingml/2006/main" wrap="square" lIns="19050" tIns="0" rIns="19050" bIns="0" anchor="t">
+          <a:bodyPr xmlns:a="http://schemas.openxmlformats.org/drawingml/2006/main" wrap="square" lIns="9525" tIns="0" rIns="9525" bIns="0" anchor="t">
             <a:noAutofit/>
           </a:bodyPr>
           <a:lstStyle xmlns:a="http://schemas.openxmlformats.org/drawingml/2006/main"/>
@@ -5331,25 +5291,25 @@
                 <a:spcPts val="6"/>
               </a:spcAft>
               <a:buNone/>
-              <a:defRPr sz="1238">
-                <a:solidFill>
-                  <a:srgbClr val="34424F"/>
-                </a:solidFill>
-                <a:latin typeface="Arial"/>
-                <a:ea typeface="Arial"/>
-                <a:cs typeface="Arial"/>
-              </a:defRPr>
-            </a:pPr>
-            <a:r>
-              <a:rPr sz="1238">
-                <a:solidFill>
-                  <a:srgbClr val="34424F"/>
-                </a:solidFill>
-                <a:latin typeface="Arial"/>
-                <a:ea typeface="Arial"/>
-                <a:cs typeface="Arial"/>
-              </a:rPr>
-              <a:t>Discarded cigarettes and delayed smoke can precede serious fires. AI Fireguard uses YOLOv5 to localise cigarette, flame and smoke for earlier human-verified alerts and later response planning.</a:t>
+              <a:defRPr sz="1200">
+                <a:solidFill>
+                  <a:srgbClr val="34424F"/>
+                </a:solidFill>
+                <a:latin typeface="Times New Roman"/>
+                <a:ea typeface="Times New Roman"/>
+                <a:cs typeface="Times New Roman"/>
+              </a:defRPr>
+            </a:pPr>
+            <a:r>
+              <a:rPr sz="1200">
+                <a:solidFill>
+                  <a:srgbClr val="34424F"/>
+                </a:solidFill>
+                <a:latin typeface="Times New Roman"/>
+                <a:ea typeface="Times New Roman"/>
+                <a:cs typeface="Times New Roman"/>
+              </a:rPr>
+              <a:t>Discarded cigarettes, early flame and delayed smoke can precede serious fires. AI Fireguard tests a compact detector for human-verified alerts and response planning.</a:t>
             </a:r>
           </a:p>
         </p:txBody>
@@ -5370,8 +5330,8 @@
         </p:nvSpPr>
         <p:spPr>
           <a:xfrm xmlns:a="http://schemas.openxmlformats.org/drawingml/2006/main">
-            <a:off x="438150" y="5048250"/>
-            <a:ext cx="3581400" cy="323850"/>
+            <a:off x="381000" y="4591050"/>
+            <a:ext cx="2800350" cy="323850"/>
           </a:xfrm>
           <a:prstGeom xmlns:a="http://schemas.openxmlformats.org/drawingml/2006/main" prst="rect">
             <a:avLst/>
@@ -5393,23 +5353,23 @@
                 <a:spcPct val="108000"/>
               </a:lnSpc>
               <a:buNone/>
-              <a:defRPr sz="1875" b="1" i="0">
+              <a:defRPr sz="2030" b="1" i="0">
                 <a:solidFill>
                   <a:srgbClr val="8E1F35"/>
                 </a:solidFill>
-                <a:latin typeface="Arial"/>
-                <a:ea typeface="Arial"/>
-                <a:cs typeface="Arial"/>
-              </a:defRPr>
-            </a:pPr>
-            <a:r>
-              <a:rPr sz="1875" b="1" i="0">
+                <a:latin typeface="Times New Roman"/>
+                <a:ea typeface="Times New Roman"/>
+                <a:cs typeface="Times New Roman"/>
+              </a:defRPr>
+            </a:pPr>
+            <a:r>
+              <a:rPr sz="2030" b="1" i="0">
                 <a:solidFill>
                   <a:srgbClr val="8E1F35"/>
                 </a:solidFill>
-                <a:latin typeface="Arial"/>
-                <a:ea typeface="Arial"/>
-                <a:cs typeface="Arial"/>
+                <a:latin typeface="Times New Roman"/>
+                <a:ea typeface="Times New Roman"/>
+                <a:cs typeface="Times New Roman"/>
               </a:rPr>
               <a:t>II. Objectives</a:t>
             </a:r>
@@ -5432,8 +5392,8 @@
         </p:nvSpPr>
         <p:spPr>
           <a:xfrm xmlns:a="http://schemas.openxmlformats.org/drawingml/2006/main">
-            <a:off x="438150" y="5391150"/>
-            <a:ext cx="3581400" cy="0"/>
+            <a:off x="381000" y="4933950"/>
+            <a:ext cx="2800350" cy="0"/>
           </a:xfrm>
           <a:prstGeom xmlns:a="http://schemas.openxmlformats.org/drawingml/2006/main" prst="line">
             <a:avLst/>
@@ -5463,8 +5423,8 @@
         </p:nvSpPr>
         <p:spPr>
           <a:xfrm xmlns:a="http://schemas.openxmlformats.org/drawingml/2006/main">
-            <a:off x="438150" y="5467350"/>
-            <a:ext cx="3581400" cy="1000125"/>
+            <a:off x="381000" y="4991100"/>
+            <a:ext cx="2800350" cy="1000125"/>
           </a:xfrm>
           <a:prstGeom xmlns:a="http://schemas.openxmlformats.org/drawingml/2006/main" prst="rect">
             <a:avLst/>
@@ -5476,7 +5436,7 @@
           </a:ln>
         </p:spPr>
         <p:txBody>
-          <a:bodyPr xmlns:a="http://schemas.openxmlformats.org/drawingml/2006/main" wrap="square" lIns="19050" tIns="0" rIns="19050" bIns="0" anchor="t">
+          <a:bodyPr xmlns:a="http://schemas.openxmlformats.org/drawingml/2006/main" wrap="square" lIns="9525" tIns="0" rIns="9525" bIns="0" anchor="t">
             <a:noAutofit/>
           </a:bodyPr>
           <a:lstStyle xmlns:a="http://schemas.openxmlformats.org/drawingml/2006/main"/>
@@ -5489,25 +5449,25 @@
                 <a:spcPts val="8"/>
               </a:spcAft>
               <a:buNone/>
-              <a:defRPr sz="1200">
-                <a:solidFill>
-                  <a:srgbClr val="34424F"/>
-                </a:solidFill>
-                <a:latin typeface="Arial"/>
-                <a:ea typeface="Arial"/>
-                <a:cs typeface="Arial"/>
-              </a:defRPr>
-            </a:pPr>
-            <a:r>
-              <a:rPr sz="1200">
-                <a:solidFill>
-                  <a:srgbClr val="34424F"/>
-                </a:solidFill>
-                <a:latin typeface="Arial"/>
-                <a:ea typeface="Arial"/>
-                <a:cs typeface="Arial"/>
-              </a:rPr>
-              <a:t>• Build a clean three-class YOLOv5 pipeline.</a:t>
+              <a:defRPr sz="1185">
+                <a:solidFill>
+                  <a:srgbClr val="34424F"/>
+                </a:solidFill>
+                <a:latin typeface="Times New Roman"/>
+                <a:ea typeface="Times New Roman"/>
+                <a:cs typeface="Times New Roman"/>
+              </a:defRPr>
+            </a:pPr>
+            <a:r>
+              <a:rPr sz="1185">
+                <a:solidFill>
+                  <a:srgbClr val="34424F"/>
+                </a:solidFill>
+                <a:latin typeface="Times New Roman"/>
+                <a:ea typeface="Times New Roman"/>
+                <a:cs typeface="Times New Roman"/>
+              </a:rPr>
+              <a:t>• Build clean three-class YOLOv5.</a:t>
             </a:r>
           </a:p>
           <a:p xmlns:a="http://schemas.openxmlformats.org/drawingml/2006/main">
@@ -5519,25 +5479,25 @@
                 <a:spcPts val="8"/>
               </a:spcAft>
               <a:buNone/>
-              <a:defRPr sz="1200">
-                <a:solidFill>
-                  <a:srgbClr val="34424F"/>
-                </a:solidFill>
-                <a:latin typeface="Arial"/>
-                <a:ea typeface="Arial"/>
-                <a:cs typeface="Arial"/>
-              </a:defRPr>
-            </a:pPr>
-            <a:r>
-              <a:rPr sz="1200">
-                <a:solidFill>
-                  <a:srgbClr val="34424F"/>
-                </a:solidFill>
-                <a:latin typeface="Arial"/>
-                <a:ea typeface="Arial"/>
-                <a:cs typeface="Arial"/>
-              </a:rPr>
-              <a:t>• Remove split leakage and label mismatch.</a:t>
+              <a:defRPr sz="1185">
+                <a:solidFill>
+                  <a:srgbClr val="34424F"/>
+                </a:solidFill>
+                <a:latin typeface="Times New Roman"/>
+                <a:ea typeface="Times New Roman"/>
+                <a:cs typeface="Times New Roman"/>
+              </a:defRPr>
+            </a:pPr>
+            <a:r>
+              <a:rPr sz="1185">
+                <a:solidFill>
+                  <a:srgbClr val="34424F"/>
+                </a:solidFill>
+                <a:latin typeface="Times New Roman"/>
+                <a:ea typeface="Times New Roman"/>
+                <a:cs typeface="Times New Roman"/>
+              </a:rPr>
+              <a:t>• Remove leakage and label mismatch.</a:t>
             </a:r>
           </a:p>
           <a:p xmlns:a="http://schemas.openxmlformats.org/drawingml/2006/main">
@@ -5549,25 +5509,25 @@
                 <a:spcPts val="8"/>
               </a:spcAft>
               <a:buNone/>
-              <a:defRPr sz="1200">
-                <a:solidFill>
-                  <a:srgbClr val="34424F"/>
-                </a:solidFill>
-                <a:latin typeface="Arial"/>
-                <a:ea typeface="Arial"/>
-                <a:cs typeface="Arial"/>
-              </a:defRPr>
-            </a:pPr>
-            <a:r>
-              <a:rPr sz="1200">
-                <a:solidFill>
-                  <a:srgbClr val="34424F"/>
-                </a:solidFill>
-                <a:latin typeface="Arial"/>
-                <a:ea typeface="Arial"/>
-                <a:cs typeface="Arial"/>
-              </a:rPr>
-              <a:t>• Quantify independent-test accuracy, class errors and inference cost.</a:t>
+              <a:defRPr sz="1185">
+                <a:solidFill>
+                  <a:srgbClr val="34424F"/>
+                </a:solidFill>
+                <a:latin typeface="Times New Roman"/>
+                <a:ea typeface="Times New Roman"/>
+                <a:cs typeface="Times New Roman"/>
+              </a:defRPr>
+            </a:pPr>
+            <a:r>
+              <a:rPr sz="1185">
+                <a:solidFill>
+                  <a:srgbClr val="34424F"/>
+                </a:solidFill>
+                <a:latin typeface="Times New Roman"/>
+                <a:ea typeface="Times New Roman"/>
+                <a:cs typeface="Times New Roman"/>
+              </a:rPr>
+              <a:t>• Compare checkpoints on one frozen test.</a:t>
             </a:r>
           </a:p>
           <a:p xmlns:a="http://schemas.openxmlformats.org/drawingml/2006/main">
@@ -5579,25 +5539,25 @@
                 <a:spcPts val="8"/>
               </a:spcAft>
               <a:buNone/>
-              <a:defRPr sz="1200">
-                <a:solidFill>
-                  <a:srgbClr val="34424F"/>
-                </a:solidFill>
-                <a:latin typeface="Arial"/>
-                <a:ea typeface="Arial"/>
-                <a:cs typeface="Arial"/>
-              </a:defRPr>
-            </a:pPr>
-            <a:r>
-              <a:rPr sz="1200">
-                <a:solidFill>
-                  <a:srgbClr val="34424F"/>
-                </a:solidFill>
-                <a:latin typeface="Arial"/>
-                <a:ea typeface="Arial"/>
-                <a:cs typeface="Arial"/>
-              </a:rPr>
-              <a:t>• Define the evidence required before deployment.</a:t>
+              <a:defRPr sz="1185">
+                <a:solidFill>
+                  <a:srgbClr val="34424F"/>
+                </a:solidFill>
+                <a:latin typeface="Times New Roman"/>
+                <a:ea typeface="Times New Roman"/>
+                <a:cs typeface="Times New Roman"/>
+              </a:defRPr>
+            </a:pPr>
+            <a:r>
+              <a:rPr sz="1185">
+                <a:solidFill>
+                  <a:srgbClr val="34424F"/>
+                </a:solidFill>
+                <a:latin typeface="Times New Roman"/>
+                <a:ea typeface="Times New Roman"/>
+                <a:cs typeface="Times New Roman"/>
+              </a:rPr>
+              <a:t>• Measure errors, speed, compute and pre-deployment evidence.</a:t>
             </a:r>
           </a:p>
         </p:txBody>
@@ -5618,8 +5578,8 @@
         </p:nvSpPr>
         <p:spPr>
           <a:xfrm xmlns:a="http://schemas.openxmlformats.org/drawingml/2006/main">
-            <a:off x="438150" y="6534150"/>
-            <a:ext cx="3581400" cy="323850"/>
+            <a:off x="381000" y="6067425"/>
+            <a:ext cx="2800350" cy="323850"/>
           </a:xfrm>
           <a:prstGeom xmlns:a="http://schemas.openxmlformats.org/drawingml/2006/main" prst="rect">
             <a:avLst/>
@@ -5641,23 +5601,23 @@
                 <a:spcPct val="108000"/>
               </a:lnSpc>
               <a:buNone/>
-              <a:defRPr sz="1875" b="1" i="0">
+              <a:defRPr sz="2030" b="1" i="0">
                 <a:solidFill>
                   <a:srgbClr val="8E1F35"/>
                 </a:solidFill>
-                <a:latin typeface="Arial"/>
-                <a:ea typeface="Arial"/>
-                <a:cs typeface="Arial"/>
-              </a:defRPr>
-            </a:pPr>
-            <a:r>
-              <a:rPr sz="1875" b="1" i="0">
+                <a:latin typeface="Times New Roman"/>
+                <a:ea typeface="Times New Roman"/>
+                <a:cs typeface="Times New Roman"/>
+              </a:defRPr>
+            </a:pPr>
+            <a:r>
+              <a:rPr sz="2030" b="1" i="0">
                 <a:solidFill>
                   <a:srgbClr val="8E1F35"/>
                 </a:solidFill>
-                <a:latin typeface="Arial"/>
-                <a:ea typeface="Arial"/>
-                <a:cs typeface="Arial"/>
+                <a:latin typeface="Times New Roman"/>
+                <a:ea typeface="Times New Roman"/>
+                <a:cs typeface="Times New Roman"/>
               </a:rPr>
               <a:t>III. Methodology</a:t>
             </a:r>
@@ -5680,8 +5640,8 @@
         </p:nvSpPr>
         <p:spPr>
           <a:xfrm xmlns:a="http://schemas.openxmlformats.org/drawingml/2006/main">
-            <a:off x="438150" y="6877050"/>
-            <a:ext cx="3581400" cy="0"/>
+            <a:off x="381000" y="6410325"/>
+            <a:ext cx="2800350" cy="0"/>
           </a:xfrm>
           <a:prstGeom xmlns:a="http://schemas.openxmlformats.org/drawingml/2006/main" prst="line">
             <a:avLst/>
@@ -5711,8 +5671,8 @@
         </p:nvSpPr>
         <p:spPr>
           <a:xfrm xmlns:a="http://schemas.openxmlformats.org/drawingml/2006/main">
-            <a:off x="628650" y="7296150"/>
-            <a:ext cx="0" cy="3181350"/>
+            <a:off x="561975" y="6648450"/>
+            <a:ext cx="0" cy="2676525"/>
           </a:xfrm>
           <a:prstGeom xmlns:a="http://schemas.openxmlformats.org/drawingml/2006/main" prst="line">
             <a:avLst/>
@@ -5742,8 +5702,8 @@
         </p:nvSpPr>
         <p:spPr>
           <a:xfrm xmlns:a="http://schemas.openxmlformats.org/drawingml/2006/main">
-            <a:off x="476250" y="7200900"/>
-            <a:ext cx="304800" cy="304800"/>
+            <a:off x="457200" y="6619875"/>
+            <a:ext cx="247650" cy="247650"/>
           </a:xfrm>
           <a:prstGeom xmlns:a="http://schemas.openxmlformats.org/drawingml/2006/main" prst="ellipse">
             <a:avLst/>
@@ -5775,8 +5735,8 @@
         </p:nvSpPr>
         <p:spPr>
           <a:xfrm xmlns:a="http://schemas.openxmlformats.org/drawingml/2006/main">
-            <a:off x="476250" y="7200900"/>
-            <a:ext cx="304800" cy="304800"/>
+            <a:off x="457200" y="6619875"/>
+            <a:ext cx="247650" cy="247650"/>
           </a:xfrm>
           <a:prstGeom xmlns:a="http://schemas.openxmlformats.org/drawingml/2006/main" prst="rect">
             <a:avLst/>
@@ -5798,23 +5758,23 @@
                 <a:spcPct val="108000"/>
               </a:lnSpc>
               <a:buNone/>
-              <a:defRPr sz="1200" b="1" i="0">
+              <a:defRPr sz="1163" b="1" i="0">
                 <a:solidFill>
                   <a:srgbClr val="FFFFFF"/>
                 </a:solidFill>
-                <a:latin typeface="Arial"/>
-                <a:ea typeface="Arial"/>
-                <a:cs typeface="Arial"/>
-              </a:defRPr>
-            </a:pPr>
-            <a:r>
-              <a:rPr sz="1200" b="1" i="0">
+                <a:latin typeface="Times New Roman"/>
+                <a:ea typeface="Times New Roman"/>
+                <a:cs typeface="Times New Roman"/>
+              </a:defRPr>
+            </a:pPr>
+            <a:r>
+              <a:rPr sz="1163" b="1" i="0">
                 <a:solidFill>
                   <a:srgbClr val="FFFFFF"/>
                 </a:solidFill>
-                <a:latin typeface="Arial"/>
-                <a:ea typeface="Arial"/>
-                <a:cs typeface="Arial"/>
+                <a:latin typeface="Times New Roman"/>
+                <a:ea typeface="Times New Roman"/>
+                <a:cs typeface="Times New Roman"/>
               </a:rPr>
               <a:t>1</a:t>
             </a:r>
@@ -5837,12 +5797,12 @@
         </p:nvSpPr>
         <p:spPr>
           <a:xfrm xmlns:a="http://schemas.openxmlformats.org/drawingml/2006/main">
-            <a:off x="866775" y="7029450"/>
-            <a:ext cx="3152775" cy="647700"/>
+            <a:off x="781050" y="6477000"/>
+            <a:ext cx="2381250" cy="552450"/>
           </a:xfrm>
           <a:prstGeom xmlns:a="http://schemas.openxmlformats.org/drawingml/2006/main" prst="roundRect">
             <a:avLst>
-              <a:gd name="adj" fmla="val 16176"/>
+              <a:gd name="adj" fmla="val 15517"/>
             </a:avLst>
           </a:prstGeom>
           <a:solidFill xmlns:a="http://schemas.openxmlformats.org/drawingml/2006/main">
@@ -5856,7 +5816,7 @@
           </a:ln>
         </p:spPr>
         <p:txBody>
-          <a:bodyPr xmlns:a="http://schemas.openxmlformats.org/drawingml/2006/main" wrap="square" lIns="114300" tIns="57150" rIns="95250" bIns="57150" anchor="ctr">
+          <a:bodyPr xmlns:a="http://schemas.openxmlformats.org/drawingml/2006/main" wrap="square" lIns="85725" tIns="28575" rIns="66675" bIns="28575" anchor="ctr">
             <a:noAutofit/>
           </a:bodyPr>
           <a:lstStyle xmlns:a="http://schemas.openxmlformats.org/drawingml/2006/main"/>
@@ -5866,25 +5826,25 @@
                 <a:spcPct val="104000"/>
               </a:lnSpc>
               <a:buNone/>
-              <a:defRPr sz="1163">
-                <a:solidFill>
-                  <a:srgbClr val="34424F"/>
-                </a:solidFill>
-                <a:latin typeface="Arial"/>
-                <a:ea typeface="Arial"/>
-                <a:cs typeface="Arial"/>
-              </a:defRPr>
-            </a:pPr>
-            <a:r>
-              <a:rPr sz="1163" b="1">
+              <a:defRPr sz="1215">
+                <a:solidFill>
+                  <a:srgbClr val="34424F"/>
+                </a:solidFill>
+                <a:latin typeface="Times New Roman"/>
+                <a:ea typeface="Times New Roman"/>
+                <a:cs typeface="Times New Roman"/>
+              </a:defRPr>
+            </a:pPr>
+            <a:r>
+              <a:rPr sz="1215" b="1">
                 <a:solidFill>
                   <a:srgbClr val="17212B"/>
                 </a:solidFill>
-                <a:latin typeface="Arial"/>
-                <a:ea typeface="Arial"/>
-                <a:cs typeface="Arial"/>
-              </a:rPr>
-              <a:t>Group source images</a:t>
+                <a:latin typeface="Times New Roman"/>
+                <a:ea typeface="Times New Roman"/>
+                <a:cs typeface="Times New Roman"/>
+              </a:rPr>
+              <a:t>Group sources</a:t>
             </a:r>
           </a:p>
           <a:p xmlns:a="http://schemas.openxmlformats.org/drawingml/2006/main">
@@ -5893,25 +5853,25 @@
                 <a:spcPct val="104000"/>
               </a:lnSpc>
               <a:buNone/>
-              <a:defRPr sz="1163">
-                <a:solidFill>
-                  <a:srgbClr val="34424F"/>
-                </a:solidFill>
-                <a:latin typeface="Arial"/>
-                <a:ea typeface="Arial"/>
-                <a:cs typeface="Arial"/>
-              </a:defRPr>
-            </a:pPr>
-            <a:r>
-              <a:rPr sz="1163">
-                <a:solidFill>
-                  <a:srgbClr val="34424F"/>
-                </a:solidFill>
-                <a:latin typeface="Arial"/>
-                <a:ea typeface="Arial"/>
-                <a:cs typeface="Arial"/>
-              </a:rPr>
-              <a:t>Retain background-only negatives</a:t>
+              <a:defRPr sz="1215">
+                <a:solidFill>
+                  <a:srgbClr val="34424F"/>
+                </a:solidFill>
+                <a:latin typeface="Times New Roman"/>
+                <a:ea typeface="Times New Roman"/>
+                <a:cs typeface="Times New Roman"/>
+              </a:defRPr>
+            </a:pPr>
+            <a:r>
+              <a:rPr sz="1215">
+                <a:solidFill>
+                  <a:srgbClr val="34424F"/>
+                </a:solidFill>
+                <a:latin typeface="Times New Roman"/>
+                <a:ea typeface="Times New Roman"/>
+                <a:cs typeface="Times New Roman"/>
+              </a:rPr>
+              <a:t>Keep background negatives</a:t>
             </a:r>
           </a:p>
         </p:txBody>
@@ -5932,8 +5892,8 @@
         </p:nvSpPr>
         <p:spPr>
           <a:xfrm xmlns:a="http://schemas.openxmlformats.org/drawingml/2006/main">
-            <a:off x="476250" y="7905750"/>
-            <a:ext cx="304800" cy="304800"/>
+            <a:off x="457200" y="7191375"/>
+            <a:ext cx="247650" cy="247650"/>
           </a:xfrm>
           <a:prstGeom xmlns:a="http://schemas.openxmlformats.org/drawingml/2006/main" prst="ellipse">
             <a:avLst/>
@@ -5965,8 +5925,8 @@
         </p:nvSpPr>
         <p:spPr>
           <a:xfrm xmlns:a="http://schemas.openxmlformats.org/drawingml/2006/main">
-            <a:off x="476250" y="7905750"/>
-            <a:ext cx="304800" cy="304800"/>
+            <a:off x="457200" y="7191375"/>
+            <a:ext cx="247650" cy="247650"/>
           </a:xfrm>
           <a:prstGeom xmlns:a="http://schemas.openxmlformats.org/drawingml/2006/main" prst="rect">
             <a:avLst/>
@@ -5988,23 +5948,23 @@
                 <a:spcPct val="108000"/>
               </a:lnSpc>
               <a:buNone/>
-              <a:defRPr sz="1200" b="1" i="0">
+              <a:defRPr sz="1163" b="1" i="0">
                 <a:solidFill>
                   <a:srgbClr val="FFFFFF"/>
                 </a:solidFill>
-                <a:latin typeface="Arial"/>
-                <a:ea typeface="Arial"/>
-                <a:cs typeface="Arial"/>
-              </a:defRPr>
-            </a:pPr>
-            <a:r>
-              <a:rPr sz="1200" b="1" i="0">
+                <a:latin typeface="Times New Roman"/>
+                <a:ea typeface="Times New Roman"/>
+                <a:cs typeface="Times New Roman"/>
+              </a:defRPr>
+            </a:pPr>
+            <a:r>
+              <a:rPr sz="1163" b="1" i="0">
                 <a:solidFill>
                   <a:srgbClr val="FFFFFF"/>
                 </a:solidFill>
-                <a:latin typeface="Arial"/>
-                <a:ea typeface="Arial"/>
-                <a:cs typeface="Arial"/>
+                <a:latin typeface="Times New Roman"/>
+                <a:ea typeface="Times New Roman"/>
+                <a:cs typeface="Times New Roman"/>
               </a:rPr>
               <a:t>2</a:t>
             </a:r>
@@ -6027,12 +5987,12 @@
         </p:nvSpPr>
         <p:spPr>
           <a:xfrm xmlns:a="http://schemas.openxmlformats.org/drawingml/2006/main">
-            <a:off x="866775" y="7734300"/>
-            <a:ext cx="3152775" cy="647700"/>
+            <a:off x="781050" y="7048500"/>
+            <a:ext cx="2381250" cy="552450"/>
           </a:xfrm>
           <a:prstGeom xmlns:a="http://schemas.openxmlformats.org/drawingml/2006/main" prst="roundRect">
             <a:avLst>
-              <a:gd name="adj" fmla="val 16176"/>
+              <a:gd name="adj" fmla="val 15517"/>
             </a:avLst>
           </a:prstGeom>
           <a:solidFill xmlns:a="http://schemas.openxmlformats.org/drawingml/2006/main">
@@ -6046,7 +6006,7 @@
           </a:ln>
         </p:spPr>
         <p:txBody>
-          <a:bodyPr xmlns:a="http://schemas.openxmlformats.org/drawingml/2006/main" wrap="square" lIns="114300" tIns="57150" rIns="95250" bIns="57150" anchor="ctr">
+          <a:bodyPr xmlns:a="http://schemas.openxmlformats.org/drawingml/2006/main" wrap="square" lIns="85725" tIns="28575" rIns="66675" bIns="28575" anchor="ctr">
             <a:noAutofit/>
           </a:bodyPr>
           <a:lstStyle xmlns:a="http://schemas.openxmlformats.org/drawingml/2006/main"/>
@@ -6056,23 +6016,23 @@
                 <a:spcPct val="104000"/>
               </a:lnSpc>
               <a:buNone/>
-              <a:defRPr sz="1163">
-                <a:solidFill>
-                  <a:srgbClr val="34424F"/>
-                </a:solidFill>
-                <a:latin typeface="Arial"/>
-                <a:ea typeface="Arial"/>
-                <a:cs typeface="Arial"/>
-              </a:defRPr>
-            </a:pPr>
-            <a:r>
-              <a:rPr sz="1163" b="1">
+              <a:defRPr sz="1215">
+                <a:solidFill>
+                  <a:srgbClr val="34424F"/>
+                </a:solidFill>
+                <a:latin typeface="Times New Roman"/>
+                <a:ea typeface="Times New Roman"/>
+                <a:cs typeface="Times New Roman"/>
+              </a:defRPr>
+            </a:pPr>
+            <a:r>
+              <a:rPr sz="1215" b="1">
                 <a:solidFill>
                   <a:srgbClr val="17212B"/>
                 </a:solidFill>
-                <a:latin typeface="Arial"/>
-                <a:ea typeface="Arial"/>
-                <a:cs typeface="Arial"/>
+                <a:latin typeface="Times New Roman"/>
+                <a:ea typeface="Times New Roman"/>
+                <a:cs typeface="Times New Roman"/>
               </a:rPr>
               <a:t>Deduplicate</a:t>
             </a:r>
@@ -6083,25 +6043,25 @@
                 <a:spcPct val="104000"/>
               </a:lnSpc>
               <a:buNone/>
-              <a:defRPr sz="1163">
-                <a:solidFill>
-                  <a:srgbClr val="34424F"/>
-                </a:solidFill>
-                <a:latin typeface="Arial"/>
-                <a:ea typeface="Arial"/>
-                <a:cs typeface="Arial"/>
-              </a:defRPr>
-            </a:pPr>
-            <a:r>
-              <a:rPr sz="1163">
-                <a:solidFill>
-                  <a:srgbClr val="34424F"/>
-                </a:solidFill>
-                <a:latin typeface="Arial"/>
-                <a:ea typeface="Arial"/>
-                <a:cs typeface="Arial"/>
-              </a:rPr>
-              <a:t>Source names · SHA-256 · pHash ≤ 4</a:t>
+              <a:defRPr sz="1215">
+                <a:solidFill>
+                  <a:srgbClr val="34424F"/>
+                </a:solidFill>
+                <a:latin typeface="Times New Roman"/>
+                <a:ea typeface="Times New Roman"/>
+                <a:cs typeface="Times New Roman"/>
+              </a:defRPr>
+            </a:pPr>
+            <a:r>
+              <a:rPr sz="1215">
+                <a:solidFill>
+                  <a:srgbClr val="34424F"/>
+                </a:solidFill>
+                <a:latin typeface="Times New Roman"/>
+                <a:ea typeface="Times New Roman"/>
+                <a:cs typeface="Times New Roman"/>
+              </a:rPr>
+              <a:t>Name · SHA-256 · pHash ≤ 4</a:t>
             </a:r>
           </a:p>
         </p:txBody>
@@ -6122,8 +6082,8 @@
         </p:nvSpPr>
         <p:spPr>
           <a:xfrm xmlns:a="http://schemas.openxmlformats.org/drawingml/2006/main">
-            <a:off x="476250" y="8610600"/>
-            <a:ext cx="304800" cy="304800"/>
+            <a:off x="457200" y="7762875"/>
+            <a:ext cx="247650" cy="247650"/>
           </a:xfrm>
           <a:prstGeom xmlns:a="http://schemas.openxmlformats.org/drawingml/2006/main" prst="ellipse">
             <a:avLst/>
@@ -6155,8 +6115,8 @@
         </p:nvSpPr>
         <p:spPr>
           <a:xfrm xmlns:a="http://schemas.openxmlformats.org/drawingml/2006/main">
-            <a:off x="476250" y="8610600"/>
-            <a:ext cx="304800" cy="304800"/>
+            <a:off x="457200" y="7762875"/>
+            <a:ext cx="247650" cy="247650"/>
           </a:xfrm>
           <a:prstGeom xmlns:a="http://schemas.openxmlformats.org/drawingml/2006/main" prst="rect">
             <a:avLst/>
@@ -6178,23 +6138,23 @@
                 <a:spcPct val="108000"/>
               </a:lnSpc>
               <a:buNone/>
-              <a:defRPr sz="1200" b="1" i="0">
+              <a:defRPr sz="1163" b="1" i="0">
                 <a:solidFill>
                   <a:srgbClr val="FFFFFF"/>
                 </a:solidFill>
-                <a:latin typeface="Arial"/>
-                <a:ea typeface="Arial"/>
-                <a:cs typeface="Arial"/>
-              </a:defRPr>
-            </a:pPr>
-            <a:r>
-              <a:rPr sz="1200" b="1" i="0">
+                <a:latin typeface="Times New Roman"/>
+                <a:ea typeface="Times New Roman"/>
+                <a:cs typeface="Times New Roman"/>
+              </a:defRPr>
+            </a:pPr>
+            <a:r>
+              <a:rPr sz="1163" b="1" i="0">
                 <a:solidFill>
                   <a:srgbClr val="FFFFFF"/>
                 </a:solidFill>
-                <a:latin typeface="Arial"/>
-                <a:ea typeface="Arial"/>
-                <a:cs typeface="Arial"/>
+                <a:latin typeface="Times New Roman"/>
+                <a:ea typeface="Times New Roman"/>
+                <a:cs typeface="Times New Roman"/>
               </a:rPr>
               <a:t>3</a:t>
             </a:r>
@@ -6217,12 +6177,12 @@
         </p:nvSpPr>
         <p:spPr>
           <a:xfrm xmlns:a="http://schemas.openxmlformats.org/drawingml/2006/main">
-            <a:off x="866775" y="8439150"/>
-            <a:ext cx="3152775" cy="647700"/>
+            <a:off x="781050" y="7620000"/>
+            <a:ext cx="2381250" cy="552450"/>
           </a:xfrm>
           <a:prstGeom xmlns:a="http://schemas.openxmlformats.org/drawingml/2006/main" prst="roundRect">
             <a:avLst>
-              <a:gd name="adj" fmla="val 16176"/>
+              <a:gd name="adj" fmla="val 15517"/>
             </a:avLst>
           </a:prstGeom>
           <a:solidFill xmlns:a="http://schemas.openxmlformats.org/drawingml/2006/main">
@@ -6236,7 +6196,7 @@
           </a:ln>
         </p:spPr>
         <p:txBody>
-          <a:bodyPr xmlns:a="http://schemas.openxmlformats.org/drawingml/2006/main" wrap="square" lIns="114300" tIns="57150" rIns="95250" bIns="57150" anchor="ctr">
+          <a:bodyPr xmlns:a="http://schemas.openxmlformats.org/drawingml/2006/main" wrap="square" lIns="85725" tIns="28575" rIns="66675" bIns="28575" anchor="ctr">
             <a:noAutofit/>
           </a:bodyPr>
           <a:lstStyle xmlns:a="http://schemas.openxmlformats.org/drawingml/2006/main"/>
@@ -6246,25 +6206,25 @@
                 <a:spcPct val="104000"/>
               </a:lnSpc>
               <a:buNone/>
-              <a:defRPr sz="1163">
-                <a:solidFill>
-                  <a:srgbClr val="34424F"/>
-                </a:solidFill>
-                <a:latin typeface="Arial"/>
-                <a:ea typeface="Arial"/>
-                <a:cs typeface="Arial"/>
-              </a:defRPr>
-            </a:pPr>
-            <a:r>
-              <a:rPr sz="1163" b="1">
+              <a:defRPr sz="1215">
+                <a:solidFill>
+                  <a:srgbClr val="34424F"/>
+                </a:solidFill>
+                <a:latin typeface="Times New Roman"/>
+                <a:ea typeface="Times New Roman"/>
+                <a:cs typeface="Times New Roman"/>
+              </a:defRPr>
+            </a:pPr>
+            <a:r>
+              <a:rPr sz="1215" b="1">
                 <a:solidFill>
                   <a:srgbClr val="17212B"/>
                 </a:solidFill>
-                <a:latin typeface="Arial"/>
-                <a:ea typeface="Arial"/>
-                <a:cs typeface="Arial"/>
-              </a:rPr>
-              <a:t>Freeze the clean split</a:t>
+                <a:latin typeface="Times New Roman"/>
+                <a:ea typeface="Times New Roman"/>
+                <a:cs typeface="Times New Roman"/>
+              </a:rPr>
+              <a:t>Freeze clean split</a:t>
             </a:r>
           </a:p>
           <a:p xmlns:a="http://schemas.openxmlformats.org/drawingml/2006/main">
@@ -6273,23 +6233,23 @@
                 <a:spcPct val="104000"/>
               </a:lnSpc>
               <a:buNone/>
-              <a:defRPr sz="1163">
-                <a:solidFill>
-                  <a:srgbClr val="34424F"/>
-                </a:solidFill>
-                <a:latin typeface="Arial"/>
-                <a:ea typeface="Arial"/>
-                <a:cs typeface="Arial"/>
-              </a:defRPr>
-            </a:pPr>
-            <a:r>
-              <a:rPr sz="1163">
-                <a:solidFill>
-                  <a:srgbClr val="34424F"/>
-                </a:solidFill>
-                <a:latin typeface="Arial"/>
-                <a:ea typeface="Arial"/>
-                <a:cs typeface="Arial"/>
+              <a:defRPr sz="1215">
+                <a:solidFill>
+                  <a:srgbClr val="34424F"/>
+                </a:solidFill>
+                <a:latin typeface="Times New Roman"/>
+                <a:ea typeface="Times New Roman"/>
+                <a:cs typeface="Times New Roman"/>
+              </a:defRPr>
+            </a:pPr>
+            <a:r>
+              <a:rPr sz="1215">
+                <a:solidFill>
+                  <a:srgbClr val="34424F"/>
+                </a:solidFill>
+                <a:latin typeface="Times New Roman"/>
+                <a:ea typeface="Times New Roman"/>
+                <a:cs typeface="Times New Roman"/>
               </a:rPr>
               <a:t>1,511 train · 188 val · 188 test</a:t>
             </a:r>
@@ -6312,8 +6272,8 @@
         </p:nvSpPr>
         <p:spPr>
           <a:xfrm xmlns:a="http://schemas.openxmlformats.org/drawingml/2006/main">
-            <a:off x="476250" y="9315450"/>
-            <a:ext cx="304800" cy="304800"/>
+            <a:off x="457200" y="8334375"/>
+            <a:ext cx="247650" cy="247650"/>
           </a:xfrm>
           <a:prstGeom xmlns:a="http://schemas.openxmlformats.org/drawingml/2006/main" prst="ellipse">
             <a:avLst/>
@@ -6345,8 +6305,8 @@
         </p:nvSpPr>
         <p:spPr>
           <a:xfrm xmlns:a="http://schemas.openxmlformats.org/drawingml/2006/main">
-            <a:off x="476250" y="9315450"/>
-            <a:ext cx="304800" cy="304800"/>
+            <a:off x="457200" y="8334375"/>
+            <a:ext cx="247650" cy="247650"/>
           </a:xfrm>
           <a:prstGeom xmlns:a="http://schemas.openxmlformats.org/drawingml/2006/main" prst="rect">
             <a:avLst/>
@@ -6368,23 +6328,23 @@
                 <a:spcPct val="108000"/>
               </a:lnSpc>
               <a:buNone/>
-              <a:defRPr sz="1200" b="1" i="0">
+              <a:defRPr sz="1163" b="1" i="0">
                 <a:solidFill>
                   <a:srgbClr val="FFFFFF"/>
                 </a:solidFill>
-                <a:latin typeface="Arial"/>
-                <a:ea typeface="Arial"/>
-                <a:cs typeface="Arial"/>
-              </a:defRPr>
-            </a:pPr>
-            <a:r>
-              <a:rPr sz="1200" b="1" i="0">
+                <a:latin typeface="Times New Roman"/>
+                <a:ea typeface="Times New Roman"/>
+                <a:cs typeface="Times New Roman"/>
+              </a:defRPr>
+            </a:pPr>
+            <a:r>
+              <a:rPr sz="1163" b="1" i="0">
                 <a:solidFill>
                   <a:srgbClr val="FFFFFF"/>
                 </a:solidFill>
-                <a:latin typeface="Arial"/>
-                <a:ea typeface="Arial"/>
-                <a:cs typeface="Arial"/>
+                <a:latin typeface="Times New Roman"/>
+                <a:ea typeface="Times New Roman"/>
+                <a:cs typeface="Times New Roman"/>
               </a:rPr>
               <a:t>4</a:t>
             </a:r>
@@ -6407,12 +6367,12 @@
         </p:nvSpPr>
         <p:spPr>
           <a:xfrm xmlns:a="http://schemas.openxmlformats.org/drawingml/2006/main">
-            <a:off x="866775" y="9144000"/>
-            <a:ext cx="3152775" cy="647700"/>
+            <a:off x="781050" y="8191500"/>
+            <a:ext cx="2381250" cy="552450"/>
           </a:xfrm>
           <a:prstGeom xmlns:a="http://schemas.openxmlformats.org/drawingml/2006/main" prst="roundRect">
             <a:avLst>
-              <a:gd name="adj" fmla="val 16176"/>
+              <a:gd name="adj" fmla="val 15517"/>
             </a:avLst>
           </a:prstGeom>
           <a:solidFill xmlns:a="http://schemas.openxmlformats.org/drawingml/2006/main">
@@ -6426,7 +6386,7 @@
           </a:ln>
         </p:spPr>
         <p:txBody>
-          <a:bodyPr xmlns:a="http://schemas.openxmlformats.org/drawingml/2006/main" wrap="square" lIns="114300" tIns="57150" rIns="95250" bIns="57150" anchor="ctr">
+          <a:bodyPr xmlns:a="http://schemas.openxmlformats.org/drawingml/2006/main" wrap="square" lIns="85725" tIns="28575" rIns="66675" bIns="28575" anchor="ctr">
             <a:noAutofit/>
           </a:bodyPr>
           <a:lstStyle xmlns:a="http://schemas.openxmlformats.org/drawingml/2006/main"/>
@@ -6436,23 +6396,23 @@
                 <a:spcPct val="104000"/>
               </a:lnSpc>
               <a:buNone/>
-              <a:defRPr sz="1163">
-                <a:solidFill>
-                  <a:srgbClr val="34424F"/>
-                </a:solidFill>
-                <a:latin typeface="Arial"/>
-                <a:ea typeface="Arial"/>
-                <a:cs typeface="Arial"/>
-              </a:defRPr>
-            </a:pPr>
-            <a:r>
-              <a:rPr sz="1163" b="1">
+              <a:defRPr sz="1215">
+                <a:solidFill>
+                  <a:srgbClr val="34424F"/>
+                </a:solidFill>
+                <a:latin typeface="Times New Roman"/>
+                <a:ea typeface="Times New Roman"/>
+                <a:cs typeface="Times New Roman"/>
+              </a:defRPr>
+            </a:pPr>
+            <a:r>
+              <a:rPr sz="1215" b="1">
                 <a:solidFill>
                   <a:srgbClr val="17212B"/>
                 </a:solidFill>
-                <a:latin typeface="Arial"/>
-                <a:ea typeface="Arial"/>
-                <a:cs typeface="Arial"/>
+                <a:latin typeface="Times New Roman"/>
+                <a:ea typeface="Times New Roman"/>
+                <a:cs typeface="Times New Roman"/>
               </a:rPr>
               <a:t>Fine-tune YOLOv5s</a:t>
             </a:r>
@@ -6463,25 +6423,25 @@
                 <a:spcPct val="104000"/>
               </a:lnSpc>
               <a:buNone/>
-              <a:defRPr sz="1163">
-                <a:solidFill>
-                  <a:srgbClr val="34424F"/>
-                </a:solidFill>
-                <a:latin typeface="Arial"/>
-                <a:ea typeface="Arial"/>
-                <a:cs typeface="Arial"/>
-              </a:defRPr>
-            </a:pPr>
-            <a:r>
-              <a:rPr sz="1163">
-                <a:solidFill>
-                  <a:srgbClr val="34424F"/>
-                </a:solidFill>
-                <a:latin typeface="Arial"/>
-                <a:ea typeface="Arial"/>
-                <a:cs typeface="Arial"/>
-              </a:rPr>
-              <a:t>45 epochs · 640² · batch 8 · Apple MPS</a:t>
+              <a:defRPr sz="1215">
+                <a:solidFill>
+                  <a:srgbClr val="34424F"/>
+                </a:solidFill>
+                <a:latin typeface="Times New Roman"/>
+                <a:ea typeface="Times New Roman"/>
+                <a:cs typeface="Times New Roman"/>
+              </a:defRPr>
+            </a:pPr>
+            <a:r>
+              <a:rPr sz="1215">
+                <a:solidFill>
+                  <a:srgbClr val="34424F"/>
+                </a:solidFill>
+                <a:latin typeface="Times New Roman"/>
+                <a:ea typeface="Times New Roman"/>
+                <a:cs typeface="Times New Roman"/>
+              </a:rPr>
+              <a:t>45 epochs · 640² · batch 8 · MPS</a:t>
             </a:r>
           </a:p>
         </p:txBody>
@@ -6502,8 +6462,8 @@
         </p:nvSpPr>
         <p:spPr>
           <a:xfrm xmlns:a="http://schemas.openxmlformats.org/drawingml/2006/main">
-            <a:off x="476250" y="10020300"/>
-            <a:ext cx="304800" cy="304800"/>
+            <a:off x="457200" y="8905875"/>
+            <a:ext cx="247650" cy="247650"/>
           </a:xfrm>
           <a:prstGeom xmlns:a="http://schemas.openxmlformats.org/drawingml/2006/main" prst="ellipse">
             <a:avLst/>
@@ -6535,8 +6495,8 @@
         </p:nvSpPr>
         <p:spPr>
           <a:xfrm xmlns:a="http://schemas.openxmlformats.org/drawingml/2006/main">
-            <a:off x="476250" y="10020300"/>
-            <a:ext cx="304800" cy="304800"/>
+            <a:off x="457200" y="8905875"/>
+            <a:ext cx="247650" cy="247650"/>
           </a:xfrm>
           <a:prstGeom xmlns:a="http://schemas.openxmlformats.org/drawingml/2006/main" prst="rect">
             <a:avLst/>
@@ -6558,23 +6518,23 @@
                 <a:spcPct val="108000"/>
               </a:lnSpc>
               <a:buNone/>
-              <a:defRPr sz="1200" b="1" i="0">
+              <a:defRPr sz="1163" b="1" i="0">
                 <a:solidFill>
                   <a:srgbClr val="FFFFFF"/>
                 </a:solidFill>
-                <a:latin typeface="Arial"/>
-                <a:ea typeface="Arial"/>
-                <a:cs typeface="Arial"/>
-              </a:defRPr>
-            </a:pPr>
-            <a:r>
-              <a:rPr sz="1200" b="1" i="0">
+                <a:latin typeface="Times New Roman"/>
+                <a:ea typeface="Times New Roman"/>
+                <a:cs typeface="Times New Roman"/>
+              </a:defRPr>
+            </a:pPr>
+            <a:r>
+              <a:rPr sz="1163" b="1" i="0">
                 <a:solidFill>
                   <a:srgbClr val="FFFFFF"/>
                 </a:solidFill>
-                <a:latin typeface="Arial"/>
-                <a:ea typeface="Arial"/>
-                <a:cs typeface="Arial"/>
+                <a:latin typeface="Times New Roman"/>
+                <a:ea typeface="Times New Roman"/>
+                <a:cs typeface="Times New Roman"/>
               </a:rPr>
               <a:t>5</a:t>
             </a:r>
@@ -6597,12 +6557,12 @@
         </p:nvSpPr>
         <p:spPr>
           <a:xfrm xmlns:a="http://schemas.openxmlformats.org/drawingml/2006/main">
-            <a:off x="866775" y="9848850"/>
-            <a:ext cx="3152775" cy="647700"/>
+            <a:off x="781050" y="8763000"/>
+            <a:ext cx="2381250" cy="552450"/>
           </a:xfrm>
           <a:prstGeom xmlns:a="http://schemas.openxmlformats.org/drawingml/2006/main" prst="roundRect">
             <a:avLst>
-              <a:gd name="adj" fmla="val 16176"/>
+              <a:gd name="adj" fmla="val 15517"/>
             </a:avLst>
           </a:prstGeom>
           <a:solidFill xmlns:a="http://schemas.openxmlformats.org/drawingml/2006/main">
@@ -6616,7 +6576,7 @@
           </a:ln>
         </p:spPr>
         <p:txBody>
-          <a:bodyPr xmlns:a="http://schemas.openxmlformats.org/drawingml/2006/main" wrap="square" lIns="114300" tIns="57150" rIns="95250" bIns="57150" anchor="ctr">
+          <a:bodyPr xmlns:a="http://schemas.openxmlformats.org/drawingml/2006/main" wrap="square" lIns="85725" tIns="28575" rIns="66675" bIns="28575" anchor="ctr">
             <a:noAutofit/>
           </a:bodyPr>
           <a:lstStyle xmlns:a="http://schemas.openxmlformats.org/drawingml/2006/main"/>
@@ -6626,25 +6586,25 @@
                 <a:spcPct val="104000"/>
               </a:lnSpc>
               <a:buNone/>
-              <a:defRPr sz="1163">
-                <a:solidFill>
-                  <a:srgbClr val="34424F"/>
-                </a:solidFill>
-                <a:latin typeface="Arial"/>
-                <a:ea typeface="Arial"/>
-                <a:cs typeface="Arial"/>
-              </a:defRPr>
-            </a:pPr>
-            <a:r>
-              <a:rPr sz="1163" b="1">
+              <a:defRPr sz="1215">
+                <a:solidFill>
+                  <a:srgbClr val="34424F"/>
+                </a:solidFill>
+                <a:latin typeface="Times New Roman"/>
+                <a:ea typeface="Times New Roman"/>
+                <a:cs typeface="Times New Roman"/>
+              </a:defRPr>
+            </a:pPr>
+            <a:r>
+              <a:rPr sz="1215" b="1">
                 <a:solidFill>
                   <a:srgbClr val="17212B"/>
                 </a:solidFill>
-                <a:latin typeface="Arial"/>
-                <a:ea typeface="Arial"/>
-                <a:cs typeface="Arial"/>
-              </a:rPr>
-              <a:t>Independent evaluation</a:t>
+                <a:latin typeface="Times New Roman"/>
+                <a:ea typeface="Times New Roman"/>
+                <a:cs typeface="Times New Roman"/>
+              </a:rPr>
+              <a:t>Independent test</a:t>
             </a:r>
           </a:p>
           <a:p xmlns:a="http://schemas.openxmlformats.org/drawingml/2006/main">
@@ -6653,25 +6613,25 @@
                 <a:spcPct val="104000"/>
               </a:lnSpc>
               <a:buNone/>
-              <a:defRPr sz="1163">
-                <a:solidFill>
-                  <a:srgbClr val="34424F"/>
-                </a:solidFill>
-                <a:latin typeface="Arial"/>
-                <a:ea typeface="Arial"/>
-                <a:cs typeface="Arial"/>
-              </a:defRPr>
-            </a:pPr>
-            <a:r>
-              <a:rPr sz="1163">
-                <a:solidFill>
-                  <a:srgbClr val="34424F"/>
-                </a:solidFill>
-                <a:latin typeface="Arial"/>
-                <a:ea typeface="Arial"/>
-                <a:cs typeface="Arial"/>
-              </a:rPr>
-              <a:t>Both checkpoints · same 188-image test</a:t>
+              <a:defRPr sz="1215">
+                <a:solidFill>
+                  <a:srgbClr val="34424F"/>
+                </a:solidFill>
+                <a:latin typeface="Times New Roman"/>
+                <a:ea typeface="Times New Roman"/>
+                <a:cs typeface="Times New Roman"/>
+              </a:defRPr>
+            </a:pPr>
+            <a:r>
+              <a:rPr sz="1215">
+                <a:solidFill>
+                  <a:srgbClr val="34424F"/>
+                </a:solidFill>
+                <a:latin typeface="Times New Roman"/>
+                <a:ea typeface="Times New Roman"/>
+                <a:cs typeface="Times New Roman"/>
+              </a:rPr>
+              <a:t>Both checkpoints · same test</a:t>
             </a:r>
           </a:p>
         </p:txBody>
@@ -6692,12 +6652,12 @@
         </p:nvSpPr>
         <p:spPr>
           <a:xfrm xmlns:a="http://schemas.openxmlformats.org/drawingml/2006/main">
-            <a:off x="438150" y="10668000"/>
-            <a:ext cx="3581400" cy="1371600"/>
+            <a:off x="381000" y="9439275"/>
+            <a:ext cx="2800350" cy="1724025"/>
           </a:xfrm>
           <a:prstGeom xmlns:a="http://schemas.openxmlformats.org/drawingml/2006/main" prst="roundRect">
             <a:avLst>
-              <a:gd name="adj" fmla="val 7639"/>
+              <a:gd name="adj" fmla="val 5525"/>
             </a:avLst>
           </a:prstGeom>
           <a:solidFill xmlns:a="http://schemas.openxmlformats.org/drawingml/2006/main">
@@ -6711,7 +6671,7 @@
           </a:ln>
         </p:spPr>
         <p:txBody>
-          <a:bodyPr xmlns:a="http://schemas.openxmlformats.org/drawingml/2006/main" wrap="square" lIns="114300" tIns="76200" rIns="114300" bIns="76200" anchor="ctr">
+          <a:bodyPr xmlns:a="http://schemas.openxmlformats.org/drawingml/2006/main" wrap="square" lIns="66675" tIns="47625" rIns="66675" bIns="47625" anchor="ctr">
             <a:noAutofit/>
           </a:bodyPr>
           <a:lstStyle xmlns:a="http://schemas.openxmlformats.org/drawingml/2006/main"/>
@@ -6721,25 +6681,25 @@
                 <a:spcPct val="108000"/>
               </a:lnSpc>
               <a:buNone/>
-              <a:defRPr sz="1102" b="0">
-                <a:solidFill>
-                  <a:srgbClr val="34424F"/>
-                </a:solidFill>
-                <a:latin typeface="Arial"/>
-                <a:ea typeface="Arial"/>
-                <a:cs typeface="Arial"/>
-              </a:defRPr>
-            </a:pPr>
-            <a:r>
-              <a:rPr sz="1102" b="1">
+              <a:defRPr sz="1223" b="1">
+                <a:solidFill>
+                  <a:srgbClr val="34424F"/>
+                </a:solidFill>
+                <a:latin typeface="Times New Roman"/>
+                <a:ea typeface="Times New Roman"/>
+                <a:cs typeface="Times New Roman"/>
+              </a:defRPr>
+            </a:pPr>
+            <a:r>
+              <a:rPr sz="1223" b="1">
                 <a:solidFill>
                   <a:srgbClr val="8E1F35"/>
                 </a:solidFill>
-                <a:latin typeface="Arial"/>
-                <a:ea typeface="Arial"/>
-                <a:cs typeface="Arial"/>
-              </a:rPr>
-              <a:t>LEAKAGE AUDIT</a:t>
+                <a:latin typeface="Times New Roman"/>
+                <a:ea typeface="Times New Roman"/>
+                <a:cs typeface="Times New Roman"/>
+              </a:rPr>
+              <a:t>DATASET + LEAKAGE AUDIT</a:t>
             </a:r>
           </a:p>
           <a:p xmlns:a="http://schemas.openxmlformats.org/drawingml/2006/main">
@@ -6748,23 +6708,23 @@
                 <a:spcPct val="108000"/>
               </a:lnSpc>
               <a:buNone/>
-              <a:defRPr sz="1102" b="0">
-                <a:solidFill>
-                  <a:srgbClr val="34424F"/>
-                </a:solidFill>
-                <a:latin typeface="Arial"/>
-                <a:ea typeface="Arial"/>
-                <a:cs typeface="Arial"/>
-              </a:defRPr>
-            </a:pPr>
-            <a:r>
-              <a:rPr sz="1102" b="0">
-                <a:solidFill>
-                  <a:srgbClr val="34424F"/>
-                </a:solidFill>
-                <a:latin typeface="Arial"/>
-                <a:ea typeface="Arial"/>
-                <a:cs typeface="Arial"/>
+              <a:defRPr sz="1223" b="1">
+                <a:solidFill>
+                  <a:srgbClr val="34424F"/>
+                </a:solidFill>
+                <a:latin typeface="Times New Roman"/>
+                <a:ea typeface="Times New Roman"/>
+                <a:cs typeface="Times New Roman"/>
+              </a:defRPr>
+            </a:pPr>
+            <a:r>
+              <a:rPr sz="1223" b="1">
+                <a:solidFill>
+                  <a:srgbClr val="34424F"/>
+                </a:solidFill>
+                <a:latin typeface="Times New Roman"/>
+                <a:ea typeface="Times New Roman"/>
+                <a:cs typeface="Times New Roman"/>
               </a:rPr>
               <a:t>1,887 cleaned image-label pairs</a:t>
             </a:r>
@@ -6775,25 +6735,25 @@
                 <a:spcPct val="108000"/>
               </a:lnSpc>
               <a:buNone/>
-              <a:defRPr sz="1102" b="0">
-                <a:solidFill>
-                  <a:srgbClr val="34424F"/>
-                </a:solidFill>
-                <a:latin typeface="Arial"/>
-                <a:ea typeface="Arial"/>
-                <a:cs typeface="Arial"/>
-              </a:defRPr>
-            </a:pPr>
-            <a:r>
-              <a:rPr sz="1102" b="0">
-                <a:solidFill>
-                  <a:srgbClr val="34424F"/>
-                </a:solidFill>
-                <a:latin typeface="Arial"/>
-                <a:ea typeface="Arial"/>
-                <a:cs typeface="Arial"/>
-              </a:rPr>
-              <a:t>Train 1,511 (276 bg)  |  Val 188 (34 bg)  |  Test 188 (34 bg)</a:t>
+              <a:defRPr sz="1223" b="1">
+                <a:solidFill>
+                  <a:srgbClr val="34424F"/>
+                </a:solidFill>
+                <a:latin typeface="Times New Roman"/>
+                <a:ea typeface="Times New Roman"/>
+                <a:cs typeface="Times New Roman"/>
+              </a:defRPr>
+            </a:pPr>
+            <a:r>
+              <a:rPr sz="1223" b="1">
+                <a:solidFill>
+                  <a:srgbClr val="34424F"/>
+                </a:solidFill>
+                <a:latin typeface="Times New Roman"/>
+                <a:ea typeface="Times New Roman"/>
+                <a:cs typeface="Times New Roman"/>
+              </a:rPr>
+              <a:t>Train 1,511 (276 bg) | Val 188 (34 bg) | Test 188 (34 bg)</a:t>
             </a:r>
           </a:p>
           <a:p xmlns:a="http://schemas.openxmlformats.org/drawingml/2006/main">
@@ -6802,25 +6762,25 @@
                 <a:spcPct val="108000"/>
               </a:lnSpc>
               <a:buNone/>
-              <a:defRPr sz="1102" b="0">
-                <a:solidFill>
-                  <a:srgbClr val="34424F"/>
-                </a:solidFill>
-                <a:latin typeface="Arial"/>
-                <a:ea typeface="Arial"/>
-                <a:cs typeface="Arial"/>
-              </a:defRPr>
-            </a:pPr>
-            <a:r>
-              <a:rPr sz="1102" b="1">
-                <a:solidFill>
-                  <a:srgbClr val="34424F"/>
-                </a:solidFill>
-                <a:latin typeface="Arial"/>
-                <a:ea typeface="Arial"/>
-                <a:cs typeface="Arial"/>
-              </a:rPr>
-              <a:t>0 source-name, exact SHA-256 or perceptual-hash overlaps</a:t>
+              <a:defRPr sz="1223" b="1">
+                <a:solidFill>
+                  <a:srgbClr val="34424F"/>
+                </a:solidFill>
+                <a:latin typeface="Times New Roman"/>
+                <a:ea typeface="Times New Roman"/>
+                <a:cs typeface="Times New Roman"/>
+              </a:defRPr>
+            </a:pPr>
+            <a:r>
+              <a:rPr sz="1223" b="1">
+                <a:solidFill>
+                  <a:srgbClr val="34424F"/>
+                </a:solidFill>
+                <a:latin typeface="Times New Roman"/>
+                <a:ea typeface="Times New Roman"/>
+                <a:cs typeface="Times New Roman"/>
+              </a:rPr>
+              <a:t>Test: 188 images · 171 objects</a:t>
             </a:r>
           </a:p>
           <a:p xmlns:a="http://schemas.openxmlformats.org/drawingml/2006/main">
@@ -6829,25 +6789,52 @@
                 <a:spcPct val="108000"/>
               </a:lnSpc>
               <a:buNone/>
-              <a:defRPr sz="1102" b="0">
-                <a:solidFill>
-                  <a:srgbClr val="34424F"/>
-                </a:solidFill>
-                <a:latin typeface="Arial"/>
-                <a:ea typeface="Arial"/>
-                <a:cs typeface="Arial"/>
-              </a:defRPr>
-            </a:pPr>
-            <a:r>
-              <a:rPr sz="1102" b="0">
-                <a:solidFill>
-                  <a:srgbClr val="34424F"/>
-                </a:solidFill>
-                <a:latin typeface="Arial"/>
-                <a:ea typeface="Arial"/>
-                <a:cs typeface="Arial"/>
-              </a:rPr>
-              <a:t>Class 1 corrected: face-cigarette-smoking → flame</a:t>
+              <a:defRPr sz="1223" b="1">
+                <a:solidFill>
+                  <a:srgbClr val="34424F"/>
+                </a:solidFill>
+                <a:latin typeface="Times New Roman"/>
+                <a:ea typeface="Times New Roman"/>
+                <a:cs typeface="Times New Roman"/>
+              </a:defRPr>
+            </a:pPr>
+            <a:r>
+              <a:rPr sz="1223" b="1">
+                <a:solidFill>
+                  <a:srgbClr val="34424F"/>
+                </a:solidFill>
+                <a:latin typeface="Times New Roman"/>
+                <a:ea typeface="Times New Roman"/>
+                <a:cs typeface="Times New Roman"/>
+              </a:rPr>
+              <a:t>0 source-name, exact SHA-256 or pHash overlaps</a:t>
+            </a:r>
+          </a:p>
+          <a:p xmlns:a="http://schemas.openxmlformats.org/drawingml/2006/main">
+            <a:pPr algn="l">
+              <a:lnSpc>
+                <a:spcPct val="108000"/>
+              </a:lnSpc>
+              <a:buNone/>
+              <a:defRPr sz="1223" b="1">
+                <a:solidFill>
+                  <a:srgbClr val="34424F"/>
+                </a:solidFill>
+                <a:latin typeface="Times New Roman"/>
+                <a:ea typeface="Times New Roman"/>
+                <a:cs typeface="Times New Roman"/>
+              </a:defRPr>
+            </a:pPr>
+            <a:r>
+              <a:rPr sz="1223" b="1">
+                <a:solidFill>
+                  <a:srgbClr val="34424F"/>
+                </a:solidFill>
+                <a:latin typeface="Times New Roman"/>
+                <a:ea typeface="Times New Roman"/>
+                <a:cs typeface="Times New Roman"/>
+              </a:rPr>
+              <a:t>Class 1 corrected to flame</a:t>
             </a:r>
           </a:p>
         </p:txBody>
@@ -6868,8 +6855,8 @@
         </p:nvSpPr>
         <p:spPr>
           <a:xfrm xmlns:a="http://schemas.openxmlformats.org/drawingml/2006/main">
-            <a:off x="457200" y="12172950"/>
-            <a:ext cx="3543300" cy="228600"/>
+            <a:off x="400050" y="11287125"/>
+            <a:ext cx="2762250" cy="257175"/>
           </a:xfrm>
           <a:prstGeom xmlns:a="http://schemas.openxmlformats.org/drawingml/2006/main" prst="rect">
             <a:avLst/>
@@ -6891,23 +6878,23 @@
                 <a:spcPct val="108000"/>
               </a:lnSpc>
               <a:buNone/>
-              <a:defRPr sz="1163" b="1" i="0">
+              <a:defRPr sz="1350" b="1" i="0">
                 <a:solidFill>
                   <a:srgbClr val="8E1F35"/>
                 </a:solidFill>
-                <a:latin typeface="Arial"/>
-                <a:ea typeface="Arial"/>
-                <a:cs typeface="Arial"/>
-              </a:defRPr>
-            </a:pPr>
-            <a:r>
-              <a:rPr sz="1163" b="1" i="0">
+                <a:latin typeface="Times New Roman"/>
+                <a:ea typeface="Times New Roman"/>
+                <a:cs typeface="Times New Roman"/>
+              </a:defRPr>
+            </a:pPr>
+            <a:r>
+              <a:rPr sz="1350" b="1" i="0">
                 <a:solidFill>
                   <a:srgbClr val="8E1F35"/>
                 </a:solidFill>
-                <a:latin typeface="Arial"/>
-                <a:ea typeface="Arial"/>
-                <a:cs typeface="Arial"/>
+                <a:latin typeface="Times New Roman"/>
+                <a:ea typeface="Times New Roman"/>
+                <a:cs typeface="Times New Roman"/>
               </a:rPr>
               <a:t>REPRODUCIBLE LOCAL TRAINING</a:t>
             </a:r>
@@ -6930,8 +6917,8 @@
         </p:nvSpPr>
         <p:spPr>
           <a:xfrm xmlns:a="http://schemas.openxmlformats.org/drawingml/2006/main">
-            <a:off x="457200" y="12439650"/>
-            <a:ext cx="3543300" cy="742950"/>
+            <a:off x="400050" y="11582400"/>
+            <a:ext cx="2762250" cy="5610225"/>
           </a:xfrm>
           <a:prstGeom xmlns:a="http://schemas.openxmlformats.org/drawingml/2006/main" prst="rect">
             <a:avLst/>
@@ -6953,25 +6940,25 @@
                 <a:spcPct val="112000"/>
               </a:lnSpc>
               <a:buNone/>
-              <a:defRPr sz="1028" b="0" i="0">
-                <a:solidFill>
-                  <a:srgbClr val="34424F"/>
-                </a:solidFill>
-                <a:latin typeface="Arial"/>
-                <a:ea typeface="Arial"/>
-                <a:cs typeface="Arial"/>
-              </a:defRPr>
-            </a:pPr>
-            <a:r>
-              <a:rPr sz="1028" b="0" i="0">
-                <a:solidFill>
-                  <a:srgbClr val="34424F"/>
-                </a:solidFill>
-                <a:latin typeface="Arial"/>
-                <a:ea typeface="Arial"/>
-                <a:cs typeface="Arial"/>
-              </a:rPr>
-              <a:t>YOLOv5s (7.02M params) | legacy best.pt init | all layers unfrozen</a:t>
+              <a:defRPr sz="1223" b="0" i="0">
+                <a:solidFill>
+                  <a:srgbClr val="34424F"/>
+                </a:solidFill>
+                <a:latin typeface="Times New Roman"/>
+                <a:ea typeface="Times New Roman"/>
+                <a:cs typeface="Times New Roman"/>
+              </a:defRPr>
+            </a:pPr>
+            <a:r>
+              <a:rPr sz="1223" b="0" i="0">
+                <a:solidFill>
+                  <a:srgbClr val="34424F"/>
+                </a:solidFill>
+                <a:latin typeface="Times New Roman"/>
+                <a:ea typeface="Times New Roman"/>
+                <a:cs typeface="Times New Roman"/>
+              </a:rPr>
+              <a:t>YOLOv5s · 7.02M parameters · legacy best.pt initialisation · all layers unfrozen</a:t>
             </a:r>
           </a:p>
           <a:p xmlns:a="http://schemas.openxmlformats.org/drawingml/2006/main">
@@ -6980,23 +6967,23 @@
                 <a:spcPct val="112000"/>
               </a:lnSpc>
               <a:buNone/>
-              <a:defRPr sz="1028" b="0" i="0">
-                <a:solidFill>
-                  <a:srgbClr val="34424F"/>
-                </a:solidFill>
-                <a:latin typeface="Arial"/>
-                <a:ea typeface="Arial"/>
-                <a:cs typeface="Arial"/>
-              </a:defRPr>
-            </a:pPr>
-            <a:r>
-              <a:rPr sz="1028" b="0" i="0">
-                <a:solidFill>
-                  <a:srgbClr val="34424F"/>
-                </a:solidFill>
-                <a:latin typeface="Arial"/>
-                <a:ea typeface="Arial"/>
-                <a:cs typeface="Arial"/>
+              <a:defRPr sz="1223" b="0" i="0">
+                <a:solidFill>
+                  <a:srgbClr val="34424F"/>
+                </a:solidFill>
+                <a:latin typeface="Times New Roman"/>
+                <a:ea typeface="Times New Roman"/>
+                <a:cs typeface="Times New Roman"/>
+              </a:defRPr>
+            </a:pPr>
+            <a:r>
+              <a:rPr sz="1223" b="0" i="0">
+                <a:solidFill>
+                  <a:srgbClr val="34424F"/>
+                </a:solidFill>
+                <a:latin typeface="Times New Roman"/>
+                <a:ea typeface="Times New Roman"/>
+                <a:cs typeface="Times New Roman"/>
               </a:rPr>
               <a:t>45 epochs | 640 × 640 | batch 8 | MPS | workers 2 | seed 0</a:t>
             </a:r>
@@ -7007,25 +6994,241 @@
                 <a:spcPct val="112000"/>
               </a:lnSpc>
               <a:buNone/>
-              <a:defRPr sz="1028" b="0" i="0">
-                <a:solidFill>
-                  <a:srgbClr val="34424F"/>
-                </a:solidFill>
-                <a:latin typeface="Arial"/>
-                <a:ea typeface="Arial"/>
-                <a:cs typeface="Arial"/>
-              </a:defRPr>
-            </a:pPr>
-            <a:r>
-              <a:rPr sz="1028" b="0" i="0">
-                <a:solidFill>
-                  <a:srgbClr val="34424F"/>
-                </a:solidFill>
-                <a:latin typeface="Arial"/>
-                <a:ea typeface="Arial"/>
-                <a:cs typeface="Arial"/>
-              </a:rPr>
-              <a:t>2 h 04 min | 0 swaps | max RSS 2.82 GB | 14 MB model</a:t>
+              <a:defRPr sz="1223" b="0" i="0">
+                <a:solidFill>
+                  <a:srgbClr val="34424F"/>
+                </a:solidFill>
+                <a:latin typeface="Times New Roman"/>
+                <a:ea typeface="Times New Roman"/>
+                <a:cs typeface="Times New Roman"/>
+              </a:defRPr>
+            </a:pPr>
+            <a:r>
+              <a:rPr sz="1223" b="0" i="0">
+                <a:solidFill>
+                  <a:srgbClr val="34424F"/>
+                </a:solidFill>
+                <a:latin typeface="Times New Roman"/>
+                <a:ea typeface="Times New Roman"/>
+                <a:cs typeface="Times New Roman"/>
+              </a:rPr>
+              <a:t>2 h 04 min | 2.82 GB max RSS | ~13.1 GB unified-memory footprint | 0 swaps | 14 MB model | 11.3 ms/image</a:t>
+            </a:r>
+          </a:p>
+          <a:p xmlns:a="http://schemas.openxmlformats.org/drawingml/2006/main">
+            <a:pPr algn="l">
+              <a:lnSpc>
+                <a:spcPct val="112000"/>
+              </a:lnSpc>
+              <a:buNone/>
+              <a:defRPr sz="1275" b="0" i="0">
+                <a:solidFill>
+                  <a:srgbClr val="1F2428"/>
+                </a:solidFill>
+                <a:latin typeface="Times New Roman"/>
+                <a:ea typeface="Times New Roman"/>
+                <a:cs typeface="Times New Roman"/>
+              </a:defRPr>
+            </a:pPr>
+            <a:r>
+              <a:rPr sz="1275" b="0" i="0">
+                <a:solidFill>
+                  <a:srgbClr val="1F2428"/>
+                </a:solidFill>
+                <a:latin typeface="Times New Roman"/>
+                <a:ea typeface="Times New Roman"/>
+                <a:cs typeface="Times New Roman"/>
+              </a:rPr>
+              <a:t/>
+            </a:r>
+          </a:p>
+          <a:p xmlns:a="http://schemas.openxmlformats.org/drawingml/2006/main">
+            <a:pPr algn="l">
+              <a:lnSpc>
+                <a:spcPct val="112000"/>
+              </a:lnSpc>
+              <a:buNone/>
+              <a:defRPr sz="1223" b="0" i="0">
+                <a:solidFill>
+                  <a:srgbClr val="34424F"/>
+                </a:solidFill>
+                <a:latin typeface="Times New Roman"/>
+                <a:ea typeface="Times New Roman"/>
+                <a:cs typeface="Times New Roman"/>
+              </a:defRPr>
+            </a:pPr>
+            <a:r>
+              <a:rPr sz="1223" b="1" i="0">
+                <a:solidFill>
+                  <a:srgbClr val="8E1F35"/>
+                </a:solidFill>
+                <a:latin typeface="Times New Roman"/>
+                <a:ea typeface="Times New Roman"/>
+                <a:cs typeface="Times New Roman"/>
+              </a:rPr>
+              <a:t>SYSTEM CONCEPT</a:t>
+            </a:r>
+          </a:p>
+          <a:p xmlns:a="http://schemas.openxmlformats.org/drawingml/2006/main">
+            <a:pPr algn="l">
+              <a:lnSpc>
+                <a:spcPct val="112000"/>
+              </a:lnSpc>
+              <a:buNone/>
+              <a:defRPr sz="1223" b="0" i="0">
+                <a:solidFill>
+                  <a:srgbClr val="34424F"/>
+                </a:solidFill>
+                <a:latin typeface="Times New Roman"/>
+                <a:ea typeface="Times New Roman"/>
+                <a:cs typeface="Times New Roman"/>
+              </a:defRPr>
+            </a:pPr>
+            <a:r>
+              <a:rPr sz="1223" b="0" i="0">
+                <a:solidFill>
+                  <a:srgbClr val="34424F"/>
+                </a:solidFill>
+                <a:latin typeface="Times New Roman"/>
+                <a:ea typeface="Times New Roman"/>
+                <a:cs typeface="Times New Roman"/>
+              </a:rPr>
+              <a:t>CCTV / edge video → detection → confidence filter → human verification → alert and route-planning interface.</a:t>
+            </a:r>
+          </a:p>
+          <a:p xmlns:a="http://schemas.openxmlformats.org/drawingml/2006/main">
+            <a:pPr algn="l">
+              <a:lnSpc>
+                <a:spcPct val="112000"/>
+              </a:lnSpc>
+              <a:buNone/>
+              <a:defRPr sz="1275" b="0" i="0">
+                <a:solidFill>
+                  <a:srgbClr val="1F2428"/>
+                </a:solidFill>
+                <a:latin typeface="Times New Roman"/>
+                <a:ea typeface="Times New Roman"/>
+                <a:cs typeface="Times New Roman"/>
+              </a:defRPr>
+            </a:pPr>
+            <a:r>
+              <a:rPr sz="1275" b="0" i="0">
+                <a:solidFill>
+                  <a:srgbClr val="1F2428"/>
+                </a:solidFill>
+                <a:latin typeface="Times New Roman"/>
+                <a:ea typeface="Times New Roman"/>
+                <a:cs typeface="Times New Roman"/>
+              </a:rPr>
+              <a:t/>
+            </a:r>
+          </a:p>
+          <a:p xmlns:a="http://schemas.openxmlformats.org/drawingml/2006/main">
+            <a:pPr algn="l">
+              <a:lnSpc>
+                <a:spcPct val="112000"/>
+              </a:lnSpc>
+              <a:buNone/>
+              <a:defRPr sz="1223" b="0" i="0">
+                <a:solidFill>
+                  <a:srgbClr val="34424F"/>
+                </a:solidFill>
+                <a:latin typeface="Times New Roman"/>
+                <a:ea typeface="Times New Roman"/>
+                <a:cs typeface="Times New Roman"/>
+              </a:defRPr>
+            </a:pPr>
+            <a:r>
+              <a:rPr sz="1223" b="1" i="0">
+                <a:solidFill>
+                  <a:srgbClr val="8E1F35"/>
+                </a:solidFill>
+                <a:latin typeface="Times New Roman"/>
+                <a:ea typeface="Times New Roman"/>
+                <a:cs typeface="Times New Roman"/>
+              </a:rPr>
+              <a:t>EVIDENCE POLICY</a:t>
+            </a:r>
+          </a:p>
+          <a:p xmlns:a="http://schemas.openxmlformats.org/drawingml/2006/main">
+            <a:pPr algn="l">
+              <a:lnSpc>
+                <a:spcPct val="112000"/>
+              </a:lnSpc>
+              <a:buNone/>
+              <a:defRPr sz="1223" b="0" i="0">
+                <a:solidFill>
+                  <a:srgbClr val="34424F"/>
+                </a:solidFill>
+                <a:latin typeface="Times New Roman"/>
+                <a:ea typeface="Times New Roman"/>
+                <a:cs typeface="Times New Roman"/>
+              </a:defRPr>
+            </a:pPr>
+            <a:r>
+              <a:rPr sz="1223" b="0" i="0">
+                <a:solidFill>
+                  <a:srgbClr val="34424F"/>
+                </a:solidFill>
+                <a:latin typeface="Times New Roman"/>
+                <a:ea typeface="Times New Roman"/>
+                <a:cs typeface="Times New Roman"/>
+              </a:rPr>
+              <a:t>Interpret split-integrity checks and independent-test metrics together. Legacy validation and one inference image are not deployment evidence.</a:t>
+            </a:r>
+          </a:p>
+          <a:p xmlns:a="http://schemas.openxmlformats.org/drawingml/2006/main">
+            <a:pPr algn="l">
+              <a:lnSpc>
+                <a:spcPct val="112000"/>
+              </a:lnSpc>
+              <a:buNone/>
+              <a:defRPr sz="1275" b="0" i="0">
+                <a:solidFill>
+                  <a:srgbClr val="1F2428"/>
+                </a:solidFill>
+                <a:latin typeface="Times New Roman"/>
+                <a:ea typeface="Times New Roman"/>
+                <a:cs typeface="Times New Roman"/>
+              </a:defRPr>
+            </a:pPr>
+            <a:r>
+              <a:rPr sz="1275" b="0" i="0">
+                <a:solidFill>
+                  <a:srgbClr val="1F2428"/>
+                </a:solidFill>
+                <a:latin typeface="Times New Roman"/>
+                <a:ea typeface="Times New Roman"/>
+                <a:cs typeface="Times New Roman"/>
+              </a:rPr>
+              <a:t/>
+            </a:r>
+          </a:p>
+          <a:p xmlns:a="http://schemas.openxmlformats.org/drawingml/2006/main">
+            <a:pPr algn="l">
+              <a:lnSpc>
+                <a:spcPct val="112000"/>
+              </a:lnSpc>
+              <a:buNone/>
+              <a:defRPr sz="1223" b="0" i="0">
+                <a:solidFill>
+                  <a:srgbClr val="34424F"/>
+                </a:solidFill>
+                <a:latin typeface="Times New Roman"/>
+                <a:ea typeface="Times New Roman"/>
+                <a:cs typeface="Times New Roman"/>
+              </a:defRPr>
+            </a:pPr>
+            <a:r>
+              <a:rPr sz="1223" b="0" i="0">
+                <a:solidFill>
+                  <a:srgbClr val="34424F"/>
+                </a:solidFill>
+                <a:latin typeface="Times New Roman"/>
+                <a:ea typeface="Times New Roman"/>
+                <a:cs typeface="Times New Roman"/>
+              </a:rPr>
+              <a:t>Scope: detector evaluation only; route integration remains a prototype concept.</a:t>
             </a:r>
           </a:p>
         </p:txBody>
@@ -7046,12 +7249,12 @@
         </p:nvSpPr>
         <p:spPr>
           <a:xfrm xmlns:a="http://schemas.openxmlformats.org/drawingml/2006/main">
-            <a:off x="438150" y="13449300"/>
-            <a:ext cx="3581400" cy="3924300"/>
+            <a:off x="6819900" y="9144000"/>
+            <a:ext cx="3086100" cy="4724400"/>
           </a:xfrm>
           <a:prstGeom xmlns:a="http://schemas.openxmlformats.org/drawingml/2006/main" prst="roundRect">
             <a:avLst>
-              <a:gd name="adj" fmla="val 2926"/>
+              <a:gd name="adj" fmla="val 3086"/>
             </a:avLst>
           </a:prstGeom>
           <a:solidFill xmlns:a="http://schemas.openxmlformats.org/drawingml/2006/main">
@@ -7065,7 +7268,7 @@
           </a:ln>
         </p:spPr>
         <p:txBody>
-          <a:bodyPr xmlns:a="http://schemas.openxmlformats.org/drawingml/2006/main" wrap="square" lIns="123825" tIns="104775" rIns="123825" bIns="85725" anchor="t">
+          <a:bodyPr xmlns:a="http://schemas.openxmlformats.org/drawingml/2006/main" wrap="square" lIns="76200" tIns="66675" rIns="76200" bIns="66675" anchor="t">
             <a:noAutofit/>
           </a:bodyPr>
           <a:lstStyle xmlns:a="http://schemas.openxmlformats.org/drawingml/2006/main"/>
@@ -7075,47 +7278,25 @@
                 <a:spcPct val="108000"/>
               </a:lnSpc>
               <a:buNone/>
-              <a:defRPr sz="1102">
-                <a:solidFill>
-                  <a:srgbClr val="34424F"/>
-                </a:solidFill>
-                <a:latin typeface="Arial"/>
-                <a:ea typeface="Arial"/>
-                <a:cs typeface="Arial"/>
-              </a:defRPr>
-            </a:pPr>
-            <a:r>
-              <a:rPr sz="1102" b="1">
+              <a:defRPr sz="1223">
+                <a:solidFill>
+                  <a:srgbClr val="34424F"/>
+                </a:solidFill>
+                <a:latin typeface="Times New Roman"/>
+                <a:ea typeface="Times New Roman"/>
+                <a:cs typeface="Times New Roman"/>
+              </a:defRPr>
+            </a:pPr>
+            <a:r>
+              <a:rPr sz="1223" b="1">
                 <a:solidFill>
                   <a:srgbClr val="8E1F35"/>
                 </a:solidFill>
-                <a:latin typeface="Arial"/>
-                <a:ea typeface="Arial"/>
-                <a:cs typeface="Arial"/>
-              </a:rPr>
-              <a:t>ERRORS, LIMITATIONS &amp; </a:t>
-            </a:r>
-            <a:r>
-              <a:rPr sz="1102" b="1">
-                <a:solidFill>
-                  <a:srgbClr val="8E1F35"/>
-                </a:solidFill>
-                <a:latin typeface="Arial"/>
-                <a:ea typeface="Arial"/>
-                <a:cs typeface="Arial"/>
-              </a:rPr>
-              <a:t>NEXT</a:t>
-            </a:r>
-            <a:r>
-              <a:rPr sz="1102" b="1">
-                <a:solidFill>
-                  <a:srgbClr val="8E1F35"/>
-                </a:solidFill>
-                <a:latin typeface="Arial"/>
-                <a:ea typeface="Arial"/>
-                <a:cs typeface="Arial"/>
-              </a:rPr>
-              <a:t> STEPS</a:t>
+                <a:latin typeface="Times New Roman"/>
+                <a:ea typeface="Times New Roman"/>
+                <a:cs typeface="Times New Roman"/>
+              </a:rPr>
+              <a:t>ERROR ANALYSIS + NEXT EXPERIMENTS</a:t>
             </a:r>
           </a:p>
           <a:p xmlns:a="http://schemas.openxmlformats.org/drawingml/2006/main">
@@ -7124,25 +7305,25 @@
                 <a:spcPct val="108000"/>
               </a:lnSpc>
               <a:buNone/>
-              <a:defRPr sz="1102">
-                <a:solidFill>
-                  <a:srgbClr val="34424F"/>
-                </a:solidFill>
-                <a:latin typeface="Arial"/>
-                <a:ea typeface="Arial"/>
-                <a:cs typeface="Arial"/>
-              </a:defRPr>
-            </a:pPr>
-            <a:r>
-              <a:rPr sz="1102">
-                <a:solidFill>
-                  <a:srgbClr val="34424F"/>
-                </a:solidFill>
-                <a:latin typeface="Arial"/>
-                <a:ea typeface="Arial"/>
-                <a:cs typeface="Arial"/>
-              </a:rPr>
-              <a:t>• Cigarette recall 0.634: small targets and hand occlusion remain difficult.</a:t>
+              <a:defRPr sz="1275">
+                <a:solidFill>
+                  <a:srgbClr val="1F2428"/>
+                </a:solidFill>
+                <a:latin typeface="Times New Roman"/>
+                <a:ea typeface="Times New Roman"/>
+                <a:cs typeface="Times New Roman"/>
+              </a:defRPr>
+            </a:pPr>
+            <a:r>
+              <a:rPr sz="1275">
+                <a:solidFill>
+                  <a:srgbClr val="1F2428"/>
+                </a:solidFill>
+                <a:latin typeface="Times New Roman"/>
+                <a:ea typeface="Times New Roman"/>
+                <a:cs typeface="Times New Roman"/>
+              </a:rPr>
+              <a:t/>
             </a:r>
           </a:p>
           <a:p xmlns:a="http://schemas.openxmlformats.org/drawingml/2006/main">
@@ -7151,25 +7332,25 @@
                 <a:spcPct val="108000"/>
               </a:lnSpc>
               <a:buNone/>
-              <a:defRPr sz="1102">
-                <a:solidFill>
-                  <a:srgbClr val="34424F"/>
-                </a:solidFill>
-                <a:latin typeface="Arial"/>
-                <a:ea typeface="Arial"/>
-                <a:cs typeface="Arial"/>
-              </a:defRPr>
-            </a:pPr>
-            <a:r>
-              <a:rPr sz="1102">
-                <a:solidFill>
-                  <a:srgbClr val="34424F"/>
-                </a:solidFill>
-                <a:latin typeface="Arial"/>
-                <a:ea typeface="Arial"/>
-                <a:cs typeface="Arial"/>
-              </a:rPr>
-              <a:t>• Flame recall 0.740, but AP@0.5:0.95 0.360: localisation needs improvement.</a:t>
+              <a:defRPr sz="1223">
+                <a:solidFill>
+                  <a:srgbClr val="34424F"/>
+                </a:solidFill>
+                <a:latin typeface="Times New Roman"/>
+                <a:ea typeface="Times New Roman"/>
+                <a:cs typeface="Times New Roman"/>
+              </a:defRPr>
+            </a:pPr>
+            <a:r>
+              <a:rPr sz="1223" b="1">
+                <a:solidFill>
+                  <a:srgbClr val="34424F"/>
+                </a:solidFill>
+                <a:latin typeface="Times New Roman"/>
+                <a:ea typeface="Times New Roman"/>
+                <a:cs typeface="Times New Roman"/>
+              </a:rPr>
+              <a:t>1  SMALL / OCCLUDED CIGARETTES</a:t>
             </a:r>
           </a:p>
           <a:p xmlns:a="http://schemas.openxmlformats.org/drawingml/2006/main">
@@ -7178,25 +7359,25 @@
                 <a:spcPct val="108000"/>
               </a:lnSpc>
               <a:buNone/>
-              <a:defRPr sz="1102">
-                <a:solidFill>
-                  <a:srgbClr val="34424F"/>
-                </a:solidFill>
-                <a:latin typeface="Arial"/>
-                <a:ea typeface="Arial"/>
-                <a:cs typeface="Arial"/>
-              </a:defRPr>
-            </a:pPr>
-            <a:r>
-              <a:rPr sz="1102">
-                <a:solidFill>
-                  <a:srgbClr val="34424F"/>
-                </a:solidFill>
-                <a:latin typeface="Arial"/>
-                <a:ea typeface="Arial"/>
-                <a:cs typeface="Arial"/>
-              </a:rPr>
-              <a:t>• Smoke leads in precision (0.919) and strict AP (0.595), but recall is 0.667.</a:t>
+              <a:defRPr sz="1223">
+                <a:solidFill>
+                  <a:srgbClr val="34424F"/>
+                </a:solidFill>
+                <a:latin typeface="Times New Roman"/>
+                <a:ea typeface="Times New Roman"/>
+                <a:cs typeface="Times New Roman"/>
+              </a:defRPr>
+            </a:pPr>
+            <a:r>
+              <a:rPr sz="1223">
+                <a:solidFill>
+                  <a:srgbClr val="34424F"/>
+                </a:solidFill>
+                <a:latin typeface="Times New Roman"/>
+                <a:ea typeface="Times New Roman"/>
+                <a:cs typeface="Times New Roman"/>
+              </a:rPr>
+              <a:t>Add close-range and occlusion samples; tune class confidence and IoU.</a:t>
             </a:r>
           </a:p>
           <a:p xmlns:a="http://schemas.openxmlformats.org/drawingml/2006/main">
@@ -7205,25 +7386,25 @@
                 <a:spcPct val="108000"/>
               </a:lnSpc>
               <a:buNone/>
-              <a:defRPr sz="1102">
-                <a:solidFill>
-                  <a:srgbClr val="34424F"/>
-                </a:solidFill>
-                <a:latin typeface="Arial"/>
-                <a:ea typeface="Arial"/>
-                <a:cs typeface="Arial"/>
-              </a:defRPr>
-            </a:pPr>
-            <a:r>
-              <a:rPr sz="1102">
-                <a:solidFill>
-                  <a:srgbClr val="34424F"/>
-                </a:solidFill>
-                <a:latin typeface="Arial"/>
-                <a:ea typeface="Arial"/>
-                <a:cs typeface="Arial"/>
-              </a:rPr>
-              <a:t>• One-image inference and batch timing are not deployment evidence.</a:t>
+              <a:defRPr sz="1275">
+                <a:solidFill>
+                  <a:srgbClr val="1F2428"/>
+                </a:solidFill>
+                <a:latin typeface="Times New Roman"/>
+                <a:ea typeface="Times New Roman"/>
+                <a:cs typeface="Times New Roman"/>
+              </a:defRPr>
+            </a:pPr>
+            <a:r>
+              <a:rPr sz="1275">
+                <a:solidFill>
+                  <a:srgbClr val="1F2428"/>
+                </a:solidFill>
+                <a:latin typeface="Times New Roman"/>
+                <a:ea typeface="Times New Roman"/>
+                <a:cs typeface="Times New Roman"/>
+              </a:rPr>
+              <a:t/>
             </a:r>
           </a:p>
           <a:p xmlns:a="http://schemas.openxmlformats.org/drawingml/2006/main">
@@ -7232,6 +7413,60 @@
                 <a:spcPct val="108000"/>
               </a:lnSpc>
               <a:buNone/>
+              <a:defRPr sz="1223">
+                <a:solidFill>
+                  <a:srgbClr val="34424F"/>
+                </a:solidFill>
+                <a:latin typeface="Times New Roman"/>
+                <a:ea typeface="Times New Roman"/>
+                <a:cs typeface="Times New Roman"/>
+              </a:defRPr>
+            </a:pPr>
+            <a:r>
+              <a:rPr sz="1223" b="1">
+                <a:solidFill>
+                  <a:srgbClr val="34424F"/>
+                </a:solidFill>
+                <a:latin typeface="Times New Roman"/>
+                <a:ea typeface="Times New Roman"/>
+                <a:cs typeface="Times New Roman"/>
+              </a:rPr>
+              <a:t>2  FIRE-LIKE HARD NEGATIVES</a:t>
+            </a:r>
+          </a:p>
+          <a:p xmlns:a="http://schemas.openxmlformats.org/drawingml/2006/main">
+            <a:pPr algn="l">
+              <a:lnSpc>
+                <a:spcPct val="108000"/>
+              </a:lnSpc>
+              <a:buNone/>
+              <a:defRPr sz="1223">
+                <a:solidFill>
+                  <a:srgbClr val="34424F"/>
+                </a:solidFill>
+                <a:latin typeface="Times New Roman"/>
+                <a:ea typeface="Times New Roman"/>
+                <a:cs typeface="Times New Roman"/>
+              </a:defRPr>
+            </a:pPr>
+            <a:r>
+              <a:rPr sz="1223">
+                <a:solidFill>
+                  <a:srgbClr val="34424F"/>
+                </a:solidFill>
+                <a:latin typeface="Times New Roman"/>
+                <a:ea typeface="Times New Roman"/>
+                <a:cs typeface="Times New Roman"/>
+              </a:rPr>
+              <a:t>Add lights, sunsets, reflections, fog, steam and low-light scenes; measure false alarms/hour.</a:t>
+            </a:r>
+          </a:p>
+          <a:p xmlns:a="http://schemas.openxmlformats.org/drawingml/2006/main">
+            <a:pPr algn="l">
+              <a:lnSpc>
+                <a:spcPct val="108000"/>
+              </a:lnSpc>
+              <a:buNone/>
               <a:defRPr sz="1275">
                 <a:solidFill>
                   <a:srgbClr val="1F2428"/>
@@ -7259,25 +7494,25 @@
                 <a:spcPct val="108000"/>
               </a:lnSpc>
               <a:buNone/>
-              <a:defRPr sz="1102">
-                <a:solidFill>
-                  <a:srgbClr val="34424F"/>
-                </a:solidFill>
-                <a:latin typeface="Arial"/>
-                <a:ea typeface="Arial"/>
-                <a:cs typeface="Arial"/>
-              </a:defRPr>
-            </a:pPr>
-            <a:r>
-              <a:rPr sz="1102">
-                <a:solidFill>
-                  <a:srgbClr val="34424F"/>
-                </a:solidFill>
-                <a:latin typeface="Arial"/>
-                <a:ea typeface="Arial"/>
-                <a:cs typeface="Arial"/>
-              </a:rPr>
-              <a:t>NEXT</a:t>
+              <a:defRPr sz="1223">
+                <a:solidFill>
+                  <a:srgbClr val="34424F"/>
+                </a:solidFill>
+                <a:latin typeface="Times New Roman"/>
+                <a:ea typeface="Times New Roman"/>
+                <a:cs typeface="Times New Roman"/>
+              </a:defRPr>
+            </a:pPr>
+            <a:r>
+              <a:rPr sz="1223" b="1">
+                <a:solidFill>
+                  <a:srgbClr val="34424F"/>
+                </a:solidFill>
+                <a:latin typeface="Times New Roman"/>
+                <a:ea typeface="Times New Roman"/>
+                <a:cs typeface="Times New Roman"/>
+              </a:rPr>
+              <a:t>3  TEMPORAL + DOMAIN VALIDATION</a:t>
             </a:r>
           </a:p>
           <a:p xmlns:a="http://schemas.openxmlformats.org/drawingml/2006/main">
@@ -7286,25 +7521,106 @@
                 <a:spcPct val="108000"/>
               </a:lnSpc>
               <a:buNone/>
-              <a:defRPr sz="1102">
-                <a:solidFill>
-                  <a:srgbClr val="34424F"/>
-                </a:solidFill>
-                <a:latin typeface="Arial"/>
-                <a:ea typeface="Arial"/>
-                <a:cs typeface="Arial"/>
-              </a:defRPr>
-            </a:pPr>
-            <a:r>
-              <a:rPr sz="1102">
-                <a:solidFill>
-                  <a:srgbClr val="34424F"/>
-                </a:solidFill>
-                <a:latin typeface="Arial"/>
-                <a:ea typeface="Arial"/>
-                <a:cs typeface="Arial"/>
-              </a:rPr>
-              <a:t>Add low-light, occlusion, fog and steam hard negatives; calibrate each class; test temporal consistency and unseen buildings; connect only verified alerts to the escape-route prototype.</a:t>
+              <a:defRPr sz="1223">
+                <a:solidFill>
+                  <a:srgbClr val="34424F"/>
+                </a:solidFill>
+                <a:latin typeface="Times New Roman"/>
+                <a:ea typeface="Times New Roman"/>
+                <a:cs typeface="Times New Roman"/>
+              </a:defRPr>
+            </a:pPr>
+            <a:r>
+              <a:rPr sz="1223">
+                <a:solidFill>
+                  <a:srgbClr val="34424F"/>
+                </a:solidFill>
+                <a:latin typeface="Times New Roman"/>
+                <a:ea typeface="Times New Roman"/>
+                <a:cs typeface="Times New Roman"/>
+              </a:rPr>
+              <a:t>Test consistency, latency and sustained-event recall on unseen buildings/cameras.</a:t>
+            </a:r>
+          </a:p>
+          <a:p xmlns:a="http://schemas.openxmlformats.org/drawingml/2006/main">
+            <a:pPr algn="l">
+              <a:lnSpc>
+                <a:spcPct val="108000"/>
+              </a:lnSpc>
+              <a:buNone/>
+              <a:defRPr sz="1275">
+                <a:solidFill>
+                  <a:srgbClr val="1F2428"/>
+                </a:solidFill>
+                <a:latin typeface="Times New Roman"/>
+                <a:ea typeface="Times New Roman"/>
+                <a:cs typeface="Times New Roman"/>
+              </a:defRPr>
+            </a:pPr>
+            <a:r>
+              <a:rPr sz="1275">
+                <a:solidFill>
+                  <a:srgbClr val="1F2428"/>
+                </a:solidFill>
+                <a:latin typeface="Times New Roman"/>
+                <a:ea typeface="Times New Roman"/>
+                <a:cs typeface="Times New Roman"/>
+              </a:rPr>
+              <a:t/>
+            </a:r>
+          </a:p>
+          <a:p xmlns:a="http://schemas.openxmlformats.org/drawingml/2006/main">
+            <a:pPr algn="l">
+              <a:lnSpc>
+                <a:spcPct val="108000"/>
+              </a:lnSpc>
+              <a:buNone/>
+              <a:defRPr sz="1223">
+                <a:solidFill>
+                  <a:srgbClr val="34424F"/>
+                </a:solidFill>
+                <a:latin typeface="Times New Roman"/>
+                <a:ea typeface="Times New Roman"/>
+                <a:cs typeface="Times New Roman"/>
+              </a:defRPr>
+            </a:pPr>
+            <a:r>
+              <a:rPr sz="1223" b="1">
+                <a:solidFill>
+                  <a:srgbClr val="34424F"/>
+                </a:solidFill>
+                <a:latin typeface="Times New Roman"/>
+                <a:ea typeface="Times New Roman"/>
+                <a:cs typeface="Times New Roman"/>
+              </a:rPr>
+              <a:t>4  SAFE SYSTEM INTEGRATION</a:t>
+            </a:r>
+          </a:p>
+          <a:p xmlns:a="http://schemas.openxmlformats.org/drawingml/2006/main">
+            <a:pPr algn="l">
+              <a:lnSpc>
+                <a:spcPct val="108000"/>
+              </a:lnSpc>
+              <a:buNone/>
+              <a:defRPr sz="1223">
+                <a:solidFill>
+                  <a:srgbClr val="34424F"/>
+                </a:solidFill>
+                <a:latin typeface="Times New Roman"/>
+                <a:ea typeface="Times New Roman"/>
+                <a:cs typeface="Times New Roman"/>
+              </a:defRPr>
+            </a:pPr>
+            <a:r>
+              <a:rPr sz="1223">
+                <a:solidFill>
+                  <a:srgbClr val="34424F"/>
+                </a:solidFill>
+                <a:latin typeface="Times New Roman"/>
+                <a:ea typeface="Times New Roman"/>
+                <a:cs typeface="Times New Roman"/>
+              </a:rPr>
+              <a:t>Send only human-verified detections to the route prototype; certified alarms remain primary.</a:t>
             </a:r>
           </a:p>
         </p:txBody>
@@ -7325,12 +7641,12 @@
         </p:nvSpPr>
         <p:spPr>
           <a:xfrm xmlns:a="http://schemas.openxmlformats.org/drawingml/2006/main">
-            <a:off x="285750" y="2838450"/>
-            <a:ext cx="9715500" cy="514350"/>
+            <a:off x="285750" y="2581275"/>
+            <a:ext cx="9715500" cy="476250"/>
           </a:xfrm>
           <a:prstGeom xmlns:a="http://schemas.openxmlformats.org/drawingml/2006/main" prst="roundRect">
             <a:avLst>
-              <a:gd name="adj" fmla="val 18519"/>
+              <a:gd name="adj" fmla="val 20000"/>
             </a:avLst>
           </a:prstGeom>
           <a:solidFill xmlns:a="http://schemas.openxmlformats.org/drawingml/2006/main">
@@ -7344,7 +7660,7 @@
           </a:ln>
         </p:spPr>
         <p:txBody>
-          <a:bodyPr xmlns:a="http://schemas.openxmlformats.org/drawingml/2006/main" wrap="square" lIns="95250" tIns="38100" rIns="95250" bIns="38100" anchor="ctr">
+          <a:bodyPr xmlns:a="http://schemas.openxmlformats.org/drawingml/2006/main" wrap="square" lIns="76200" tIns="19050" rIns="76200" bIns="19050" anchor="ctr">
             <a:noAutofit/>
           </a:bodyPr>
           <a:lstStyle xmlns:a="http://schemas.openxmlformats.org/drawingml/2006/main"/>
@@ -7354,36 +7670,36 @@
                 <a:spcPct val="108000"/>
               </a:lnSpc>
               <a:buNone/>
-              <a:defRPr sz="1313" b="1" i="0">
+              <a:defRPr sz="1350" b="1" i="0">
                 <a:solidFill>
                   <a:srgbClr val="17212B"/>
                 </a:solidFill>
-                <a:latin typeface="Arial"/>
-                <a:ea typeface="Arial"/>
-                <a:cs typeface="Arial"/>
-              </a:defRPr>
-            </a:pPr>
-            <a:r>
-              <a:rPr sz="1313" b="1" i="0">
+                <a:latin typeface="Times New Roman"/>
+                <a:ea typeface="Times New Roman"/>
+                <a:cs typeface="Times New Roman"/>
+              </a:defRPr>
+            </a:pPr>
+            <a:r>
+              <a:rPr sz="1350" b="1" i="0">
                 <a:solidFill>
                   <a:srgbClr val="8E1F35"/>
                 </a:solidFill>
-                <a:latin typeface="Arial"/>
-                <a:ea typeface="Arial"/>
-                <a:cs typeface="Arial"/>
-              </a:rPr>
-              <a:t>CLEAN EVALUATION CHANGED THE CONCLUSION</a:t>
-            </a:r>
-            <a:r>
-              <a:rPr sz="1313" b="1" i="0">
+                <a:latin typeface="Times New Roman"/>
+                <a:ea typeface="Times New Roman"/>
+                <a:cs typeface="Times New Roman"/>
+              </a:rPr>
+              <a:t>TAKE-HOME RESULT</a:t>
+            </a:r>
+            <a:r>
+              <a:rPr sz="1350" b="1" i="0">
                 <a:solidFill>
                   <a:srgbClr val="17212B"/>
                 </a:solidFill>
-                <a:latin typeface="Arial"/>
-                <a:ea typeface="Arial"/>
-                <a:cs typeface="Arial"/>
-              </a:rPr>
-              <a:t>  |  legacy clean-test mAP@0.5 0.084  →  retrained 0.755</a:t>
+                <a:latin typeface="Times New Roman"/>
+                <a:ea typeface="Times New Roman"/>
+                <a:cs typeface="Times New Roman"/>
+              </a:rPr>
+              <a:t>  |  legacy clean-test mAP@0.5 0.084  →  leakage-safe retraining 0.755  (+0.671)</a:t>
             </a:r>
           </a:p>
         </p:txBody>
@@ -7404,8 +7720,8 @@
         </p:nvSpPr>
         <p:spPr>
           <a:xfrm xmlns:a="http://schemas.openxmlformats.org/drawingml/2006/main">
-            <a:off x="4667250" y="3705225"/>
-            <a:ext cx="5181600" cy="323850"/>
+            <a:off x="3562350" y="3314700"/>
+            <a:ext cx="3124200" cy="323850"/>
           </a:xfrm>
           <a:prstGeom xmlns:a="http://schemas.openxmlformats.org/drawingml/2006/main" prst="rect">
             <a:avLst/>
@@ -7427,23 +7743,23 @@
                 <a:spcPct val="108000"/>
               </a:lnSpc>
               <a:buNone/>
-              <a:defRPr sz="1875" b="1" i="0">
+              <a:defRPr sz="2030" b="1" i="0">
                 <a:solidFill>
                   <a:srgbClr val="8E1F35"/>
                 </a:solidFill>
-                <a:latin typeface="Arial"/>
-                <a:ea typeface="Arial"/>
-                <a:cs typeface="Arial"/>
-              </a:defRPr>
-            </a:pPr>
-            <a:r>
-              <a:rPr sz="1875" b="1" i="0">
+                <a:latin typeface="Times New Roman"/>
+                <a:ea typeface="Times New Roman"/>
+                <a:cs typeface="Times New Roman"/>
+              </a:defRPr>
+            </a:pPr>
+            <a:r>
+              <a:rPr sz="2030" b="1" i="0">
                 <a:solidFill>
                   <a:srgbClr val="8E1F35"/>
                 </a:solidFill>
-                <a:latin typeface="Arial"/>
-                <a:ea typeface="Arial"/>
-                <a:cs typeface="Arial"/>
+                <a:latin typeface="Times New Roman"/>
+                <a:ea typeface="Times New Roman"/>
+                <a:cs typeface="Times New Roman"/>
               </a:rPr>
               <a:t>IV. Findings</a:t>
             </a:r>
@@ -7466,8 +7782,8 @@
         </p:nvSpPr>
         <p:spPr>
           <a:xfrm xmlns:a="http://schemas.openxmlformats.org/drawingml/2006/main">
-            <a:off x="4667250" y="4048125"/>
-            <a:ext cx="5181600" cy="0"/>
+            <a:off x="3562350" y="3657600"/>
+            <a:ext cx="3124200" cy="0"/>
           </a:xfrm>
           <a:prstGeom xmlns:a="http://schemas.openxmlformats.org/drawingml/2006/main" prst="line">
             <a:avLst/>
@@ -7497,12 +7813,12 @@
         </p:nvSpPr>
         <p:spPr>
           <a:xfrm xmlns:a="http://schemas.openxmlformats.org/drawingml/2006/main">
-            <a:off x="4667250" y="4143375"/>
-            <a:ext cx="5181600" cy="876300"/>
+            <a:off x="3562350" y="3724275"/>
+            <a:ext cx="3124200" cy="1295400"/>
           </a:xfrm>
           <a:prstGeom xmlns:a="http://schemas.openxmlformats.org/drawingml/2006/main" prst="roundRect">
             <a:avLst>
-              <a:gd name="adj" fmla="val 11957"/>
+              <a:gd name="adj" fmla="val 7353"/>
             </a:avLst>
           </a:prstGeom>
           <a:noFill xmlns:a="http://schemas.openxmlformats.org/drawingml/2006/main"/>
@@ -7530,8 +7846,8 @@
         </p:nvSpPr>
         <p:spPr>
           <a:xfrm xmlns:a="http://schemas.openxmlformats.org/drawingml/2006/main">
-            <a:off x="4686300" y="4276725"/>
-            <a:ext cx="1276350" cy="400050"/>
+            <a:off x="3667125" y="3771900"/>
+            <a:ext cx="1390650" cy="342900"/>
           </a:xfrm>
           <a:prstGeom xmlns:a="http://schemas.openxmlformats.org/drawingml/2006/main" prst="rect">
             <a:avLst/>
@@ -7553,23 +7869,23 @@
                 <a:spcPct val="108000"/>
               </a:lnSpc>
               <a:buNone/>
-              <a:defRPr sz="2325" b="1" i="0">
+              <a:defRPr sz="2250" b="1" i="0">
                 <a:solidFill>
                   <a:srgbClr val="8E1F35"/>
                 </a:solidFill>
-                <a:latin typeface="Arial"/>
-                <a:ea typeface="Arial"/>
-                <a:cs typeface="Arial"/>
-              </a:defRPr>
-            </a:pPr>
-            <a:r>
-              <a:rPr sz="2325" b="1" i="0">
+                <a:latin typeface="Times New Roman"/>
+                <a:ea typeface="Times New Roman"/>
+                <a:cs typeface="Times New Roman"/>
+              </a:defRPr>
+            </a:pPr>
+            <a:r>
+              <a:rPr sz="2250" b="1" i="0">
                 <a:solidFill>
                   <a:srgbClr val="8E1F35"/>
                 </a:solidFill>
-                <a:latin typeface="Arial"/>
-                <a:ea typeface="Arial"/>
-                <a:cs typeface="Arial"/>
+                <a:latin typeface="Times New Roman"/>
+                <a:ea typeface="Times New Roman"/>
+                <a:cs typeface="Times New Roman"/>
               </a:rPr>
               <a:t>0.841</a:t>
             </a:r>
@@ -7592,8 +7908,8 @@
         </p:nvSpPr>
         <p:spPr>
           <a:xfrm xmlns:a="http://schemas.openxmlformats.org/drawingml/2006/main">
-            <a:off x="4686300" y="4667250"/>
-            <a:ext cx="1276350" cy="285750"/>
+            <a:off x="3667125" y="4105275"/>
+            <a:ext cx="1390650" cy="209550"/>
           </a:xfrm>
           <a:prstGeom xmlns:a="http://schemas.openxmlformats.org/drawingml/2006/main" prst="rect">
             <a:avLst/>
@@ -7615,23 +7931,23 @@
                 <a:spcPct val="108000"/>
               </a:lnSpc>
               <a:buNone/>
-              <a:defRPr sz="1013" b="1" i="0">
+              <a:defRPr sz="1148" b="1" i="0">
                 <a:solidFill>
                   <a:srgbClr val="65727D"/>
                 </a:solidFill>
-                <a:latin typeface="Arial"/>
-                <a:ea typeface="Arial"/>
-                <a:cs typeface="Arial"/>
-              </a:defRPr>
-            </a:pPr>
-            <a:r>
-              <a:rPr sz="1013" b="1" i="0">
+                <a:latin typeface="Times New Roman"/>
+                <a:ea typeface="Times New Roman"/>
+                <a:cs typeface="Times New Roman"/>
+              </a:defRPr>
+            </a:pPr>
+            <a:r>
+              <a:rPr sz="1148" b="1" i="0">
                 <a:solidFill>
                   <a:srgbClr val="65727D"/>
                 </a:solidFill>
-                <a:latin typeface="Arial"/>
-                <a:ea typeface="Arial"/>
-                <a:cs typeface="Arial"/>
+                <a:latin typeface="Times New Roman"/>
+                <a:ea typeface="Times New Roman"/>
+                <a:cs typeface="Times New Roman"/>
               </a:rPr>
               <a:t>Precision</a:t>
             </a:r>
@@ -7654,8 +7970,8 @@
         </p:nvSpPr>
         <p:spPr>
           <a:xfrm xmlns:a="http://schemas.openxmlformats.org/drawingml/2006/main">
-            <a:off x="5962650" y="4276725"/>
-            <a:ext cx="1276350" cy="400050"/>
+            <a:off x="5191125" y="3771900"/>
+            <a:ext cx="1390650" cy="342900"/>
           </a:xfrm>
           <a:prstGeom xmlns:a="http://schemas.openxmlformats.org/drawingml/2006/main" prst="rect">
             <a:avLst/>
@@ -7677,23 +7993,23 @@
                 <a:spcPct val="108000"/>
               </a:lnSpc>
               <a:buNone/>
-              <a:defRPr sz="2325" b="1" i="0">
+              <a:defRPr sz="2250" b="1" i="0">
                 <a:solidFill>
                   <a:srgbClr val="8E1F35"/>
                 </a:solidFill>
-                <a:latin typeface="Arial"/>
-                <a:ea typeface="Arial"/>
-                <a:cs typeface="Arial"/>
-              </a:defRPr>
-            </a:pPr>
-            <a:r>
-              <a:rPr sz="2325" b="1" i="0">
+                <a:latin typeface="Times New Roman"/>
+                <a:ea typeface="Times New Roman"/>
+                <a:cs typeface="Times New Roman"/>
+              </a:defRPr>
+            </a:pPr>
+            <a:r>
+              <a:rPr sz="2250" b="1" i="0">
                 <a:solidFill>
                   <a:srgbClr val="8E1F35"/>
                 </a:solidFill>
-                <a:latin typeface="Arial"/>
-                <a:ea typeface="Arial"/>
-                <a:cs typeface="Arial"/>
+                <a:latin typeface="Times New Roman"/>
+                <a:ea typeface="Times New Roman"/>
+                <a:cs typeface="Times New Roman"/>
               </a:rPr>
               <a:t>0.680</a:t>
             </a:r>
@@ -7716,8 +8032,8 @@
         </p:nvSpPr>
         <p:spPr>
           <a:xfrm xmlns:a="http://schemas.openxmlformats.org/drawingml/2006/main">
-            <a:off x="5962650" y="4667250"/>
-            <a:ext cx="1276350" cy="285750"/>
+            <a:off x="5191125" y="4105275"/>
+            <a:ext cx="1390650" cy="209550"/>
           </a:xfrm>
           <a:prstGeom xmlns:a="http://schemas.openxmlformats.org/drawingml/2006/main" prst="rect">
             <a:avLst/>
@@ -7739,23 +8055,23 @@
                 <a:spcPct val="108000"/>
               </a:lnSpc>
               <a:buNone/>
-              <a:defRPr sz="1013" b="1" i="0">
+              <a:defRPr sz="1148" b="1" i="0">
                 <a:solidFill>
                   <a:srgbClr val="65727D"/>
                 </a:solidFill>
-                <a:latin typeface="Arial"/>
-                <a:ea typeface="Arial"/>
-                <a:cs typeface="Arial"/>
-              </a:defRPr>
-            </a:pPr>
-            <a:r>
-              <a:rPr sz="1013" b="1" i="0">
+                <a:latin typeface="Times New Roman"/>
+                <a:ea typeface="Times New Roman"/>
+                <a:cs typeface="Times New Roman"/>
+              </a:defRPr>
+            </a:pPr>
+            <a:r>
+              <a:rPr sz="1148" b="1" i="0">
                 <a:solidFill>
                   <a:srgbClr val="65727D"/>
                 </a:solidFill>
-                <a:latin typeface="Arial"/>
-                <a:ea typeface="Arial"/>
-                <a:cs typeface="Arial"/>
+                <a:latin typeface="Times New Roman"/>
+                <a:ea typeface="Times New Roman"/>
+                <a:cs typeface="Times New Roman"/>
               </a:rPr>
               <a:t>Recall</a:t>
             </a:r>
@@ -7778,8 +8094,8 @@
         </p:nvSpPr>
         <p:spPr>
           <a:xfrm xmlns:a="http://schemas.openxmlformats.org/drawingml/2006/main">
-            <a:off x="7239000" y="4276725"/>
-            <a:ext cx="1276350" cy="400050"/>
+            <a:off x="3667125" y="4371975"/>
+            <a:ext cx="1390650" cy="342900"/>
           </a:xfrm>
           <a:prstGeom xmlns:a="http://schemas.openxmlformats.org/drawingml/2006/main" prst="rect">
             <a:avLst/>
@@ -7801,23 +8117,23 @@
                 <a:spcPct val="108000"/>
               </a:lnSpc>
               <a:buNone/>
-              <a:defRPr sz="2325" b="1" i="0">
+              <a:defRPr sz="2250" b="1" i="0">
                 <a:solidFill>
                   <a:srgbClr val="8E1F35"/>
                 </a:solidFill>
-                <a:latin typeface="Arial"/>
-                <a:ea typeface="Arial"/>
-                <a:cs typeface="Arial"/>
-              </a:defRPr>
-            </a:pPr>
-            <a:r>
-              <a:rPr sz="2325" b="1" i="0">
+                <a:latin typeface="Times New Roman"/>
+                <a:ea typeface="Times New Roman"/>
+                <a:cs typeface="Times New Roman"/>
+              </a:defRPr>
+            </a:pPr>
+            <a:r>
+              <a:rPr sz="2250" b="1" i="0">
                 <a:solidFill>
                   <a:srgbClr val="8E1F35"/>
                 </a:solidFill>
-                <a:latin typeface="Arial"/>
-                <a:ea typeface="Arial"/>
-                <a:cs typeface="Arial"/>
+                <a:latin typeface="Times New Roman"/>
+                <a:ea typeface="Times New Roman"/>
+                <a:cs typeface="Times New Roman"/>
               </a:rPr>
               <a:t>0.755</a:t>
             </a:r>
@@ -7840,8 +8156,8 @@
         </p:nvSpPr>
         <p:spPr>
           <a:xfrm xmlns:a="http://schemas.openxmlformats.org/drawingml/2006/main">
-            <a:off x="7239000" y="4667250"/>
-            <a:ext cx="1276350" cy="285750"/>
+            <a:off x="3667125" y="4705350"/>
+            <a:ext cx="1390650" cy="209550"/>
           </a:xfrm>
           <a:prstGeom xmlns:a="http://schemas.openxmlformats.org/drawingml/2006/main" prst="rect">
             <a:avLst/>
@@ -7863,23 +8179,23 @@
                 <a:spcPct val="108000"/>
               </a:lnSpc>
               <a:buNone/>
-              <a:defRPr sz="1013" b="1" i="0">
+              <a:defRPr sz="1148" b="1" i="0">
                 <a:solidFill>
                   <a:srgbClr val="65727D"/>
                 </a:solidFill>
-                <a:latin typeface="Arial"/>
-                <a:ea typeface="Arial"/>
-                <a:cs typeface="Arial"/>
-              </a:defRPr>
-            </a:pPr>
-            <a:r>
-              <a:rPr sz="1013" b="1" i="0">
+                <a:latin typeface="Times New Roman"/>
+                <a:ea typeface="Times New Roman"/>
+                <a:cs typeface="Times New Roman"/>
+              </a:defRPr>
+            </a:pPr>
+            <a:r>
+              <a:rPr sz="1148" b="1" i="0">
                 <a:solidFill>
                   <a:srgbClr val="65727D"/>
                 </a:solidFill>
-                <a:latin typeface="Arial"/>
-                <a:ea typeface="Arial"/>
-                <a:cs typeface="Arial"/>
+                <a:latin typeface="Times New Roman"/>
+                <a:ea typeface="Times New Roman"/>
+                <a:cs typeface="Times New Roman"/>
               </a:rPr>
               <a:t>mAP@0.5</a:t>
             </a:r>
@@ -7902,8 +8218,8 @@
         </p:nvSpPr>
         <p:spPr>
           <a:xfrm xmlns:a="http://schemas.openxmlformats.org/drawingml/2006/main">
-            <a:off x="8515350" y="4276725"/>
-            <a:ext cx="1314450" cy="400050"/>
+            <a:off x="5191125" y="4371975"/>
+            <a:ext cx="1390650" cy="342900"/>
           </a:xfrm>
           <a:prstGeom xmlns:a="http://schemas.openxmlformats.org/drawingml/2006/main" prst="rect">
             <a:avLst/>
@@ -7925,23 +8241,23 @@
                 <a:spcPct val="108000"/>
               </a:lnSpc>
               <a:buNone/>
-              <a:defRPr sz="2325" b="1" i="0">
+              <a:defRPr sz="2250" b="1" i="0">
                 <a:solidFill>
                   <a:srgbClr val="8E1F35"/>
                 </a:solidFill>
-                <a:latin typeface="Arial"/>
-                <a:ea typeface="Arial"/>
-                <a:cs typeface="Arial"/>
-              </a:defRPr>
-            </a:pPr>
-            <a:r>
-              <a:rPr sz="2325" b="1" i="0">
+                <a:latin typeface="Times New Roman"/>
+                <a:ea typeface="Times New Roman"/>
+                <a:cs typeface="Times New Roman"/>
+              </a:defRPr>
+            </a:pPr>
+            <a:r>
+              <a:rPr sz="2250" b="1" i="0">
                 <a:solidFill>
                   <a:srgbClr val="8E1F35"/>
                 </a:solidFill>
-                <a:latin typeface="Arial"/>
-                <a:ea typeface="Arial"/>
-                <a:cs typeface="Arial"/>
+                <a:latin typeface="Times New Roman"/>
+                <a:ea typeface="Times New Roman"/>
+                <a:cs typeface="Times New Roman"/>
               </a:rPr>
               <a:t>0.453</a:t>
             </a:r>
@@ -7964,8 +8280,8 @@
         </p:nvSpPr>
         <p:spPr>
           <a:xfrm xmlns:a="http://schemas.openxmlformats.org/drawingml/2006/main">
-            <a:off x="8515350" y="4667250"/>
-            <a:ext cx="1314450" cy="285750"/>
+            <a:off x="5191125" y="4705350"/>
+            <a:ext cx="1390650" cy="209550"/>
           </a:xfrm>
           <a:prstGeom xmlns:a="http://schemas.openxmlformats.org/drawingml/2006/main" prst="rect">
             <a:avLst/>
@@ -7987,23 +8303,23 @@
                 <a:spcPct val="108000"/>
               </a:lnSpc>
               <a:buNone/>
-              <a:defRPr sz="1013" b="1" i="0">
+              <a:defRPr sz="1148" b="1" i="0">
                 <a:solidFill>
                   <a:srgbClr val="65727D"/>
                 </a:solidFill>
-                <a:latin typeface="Arial"/>
-                <a:ea typeface="Arial"/>
-                <a:cs typeface="Arial"/>
-              </a:defRPr>
-            </a:pPr>
-            <a:r>
-              <a:rPr sz="1013" b="1" i="0">
+                <a:latin typeface="Times New Roman"/>
+                <a:ea typeface="Times New Roman"/>
+                <a:cs typeface="Times New Roman"/>
+              </a:defRPr>
+            </a:pPr>
+            <a:r>
+              <a:rPr sz="1148" b="1" i="0">
                 <a:solidFill>
                   <a:srgbClr val="65727D"/>
                 </a:solidFill>
-                <a:latin typeface="Arial"/>
-                <a:ea typeface="Arial"/>
-                <a:cs typeface="Arial"/>
+                <a:latin typeface="Times New Roman"/>
+                <a:ea typeface="Times New Roman"/>
+                <a:cs typeface="Times New Roman"/>
               </a:rPr>
               <a:t>mAP@0.5:0.95</a:t>
             </a:r>
@@ -8026,12 +8342,12 @@
         </p:nvSpPr>
         <p:spPr>
           <a:xfrm xmlns:a="http://schemas.openxmlformats.org/drawingml/2006/main">
-            <a:off x="4667250" y="5162550"/>
-            <a:ext cx="5181600" cy="3314700"/>
+            <a:off x="3562350" y="5124450"/>
+            <a:ext cx="3124200" cy="3105150"/>
           </a:xfrm>
           <a:prstGeom xmlns:a="http://schemas.openxmlformats.org/drawingml/2006/main" prst="roundRect">
             <a:avLst>
-              <a:gd name="adj" fmla="val 2586"/>
+              <a:gd name="adj" fmla="val 2761"/>
             </a:avLst>
           </a:prstGeom>
           <a:noFill xmlns:a="http://schemas.openxmlformats.org/drawingml/2006/main"/>
@@ -8052,13 +8368,13 @@
           <p:nvPr/>
         </p:nvPicPr>
         <p:blipFill>
-          <a:blip xmlns:r="http://schemas.openxmlformats.org/officeDocument/2006/relationships" xmlns:a="http://schemas.openxmlformats.org/drawingml/2006/main" r:embed="R59f9e95952bd478d"/>
+          <a:blip xmlns:r="http://schemas.openxmlformats.org/officeDocument/2006/relationships" xmlns:a="http://schemas.openxmlformats.org/drawingml/2006/main" r:embed="R35bd336732564b31"/>
           <a:stretch xmlns:a="http://schemas.openxmlformats.org/drawingml/2006/main"/>
         </p:blipFill>
         <p:spPr>
           <a:xfrm xmlns:a="http://schemas.openxmlformats.org/drawingml/2006/main">
-            <a:off x="4736338" y="5238750"/>
-            <a:ext cx="5043424" cy="2781300"/>
+            <a:off x="3619500" y="5357515"/>
+            <a:ext cx="3009900" cy="2210395"/>
           </a:xfrm>
           <a:prstGeom xmlns:a="http://schemas.openxmlformats.org/drawingml/2006/main" prst="rect">
             <a:avLst/>
@@ -8081,8 +8397,8 @@
         </p:nvSpPr>
         <p:spPr>
           <a:xfrm xmlns:a="http://schemas.openxmlformats.org/drawingml/2006/main">
-            <a:off x="4762500" y="8058150"/>
-            <a:ext cx="4991100" cy="361950"/>
+            <a:off x="3648075" y="7753350"/>
+            <a:ext cx="2952750" cy="419100"/>
           </a:xfrm>
           <a:prstGeom xmlns:a="http://schemas.openxmlformats.org/drawingml/2006/main" prst="rect">
             <a:avLst/>
@@ -8104,25 +8420,25 @@
                 <a:spcPct val="108000"/>
               </a:lnSpc>
               <a:buNone/>
-              <a:defRPr sz="938" b="0" i="1">
+              <a:defRPr sz="1125" b="0" i="1">
                 <a:solidFill>
                   <a:srgbClr val="E58A1F"/>
                 </a:solidFill>
-                <a:latin typeface="Arial"/>
-                <a:ea typeface="Arial"/>
-                <a:cs typeface="Arial"/>
-              </a:defRPr>
-            </a:pPr>
-            <a:r>
-              <a:rPr sz="938" b="0" i="1">
+                <a:latin typeface="Times New Roman"/>
+                <a:ea typeface="Times New Roman"/>
+                <a:cs typeface="Times New Roman"/>
+              </a:defRPr>
+            </a:pPr>
+            <a:r>
+              <a:rPr sz="1125" b="0" i="1">
                 <a:solidFill>
                   <a:srgbClr val="E58A1F"/>
                 </a:solidFill>
-                <a:latin typeface="Arial"/>
-                <a:ea typeface="Arial"/>
-                <a:cs typeface="Arial"/>
-              </a:rPr>
-              <a:t>*Legacy validation is not directly comparable: it used an old split and old class definition. Clean-test bars use the same 188 images.</a:t>
+                <a:latin typeface="Times New Roman"/>
+                <a:ea typeface="Times New Roman"/>
+                <a:cs typeface="Times New Roman"/>
+              </a:rPr>
+              <a:t>*Legacy val used an old split/class definition and is contextual only. Clean-test bars use the same 188 images.</a:t>
             </a:r>
           </a:p>
         </p:txBody>
@@ -8143,12 +8459,12 @@
         </p:nvSpPr>
         <p:spPr>
           <a:xfrm xmlns:a="http://schemas.openxmlformats.org/drawingml/2006/main">
-            <a:off x="4667250" y="10287000"/>
-            <a:ext cx="5181600" cy="2819400"/>
+            <a:off x="6819900" y="3314700"/>
+            <a:ext cx="3086100" cy="5715000"/>
           </a:xfrm>
           <a:prstGeom xmlns:a="http://schemas.openxmlformats.org/drawingml/2006/main" prst="roundRect">
             <a:avLst>
-              <a:gd name="adj" fmla="val 3041"/>
+              <a:gd name="adj" fmla="val 2778"/>
             </a:avLst>
           </a:prstGeom>
           <a:solidFill xmlns:a="http://schemas.openxmlformats.org/drawingml/2006/main">
@@ -8162,31 +8478,32 @@
           </a:ln>
         </p:spPr>
         <p:txBody>
-          <a:bodyPr xmlns:a="http://schemas.openxmlformats.org/drawingml/2006/main" wrap="square" lIns="0" tIns="66675" rIns="0" bIns="0" anchor="t">
+          <a:bodyPr xmlns:a="http://schemas.openxmlformats.org/drawingml/2006/main" wrap="square" lIns="38100" tIns="57150" rIns="38100" bIns="0" anchor="t">
             <a:noAutofit/>
           </a:bodyPr>
           <a:lstStyle xmlns:a="http://schemas.openxmlformats.org/drawingml/2006/main"/>
           <a:p xmlns:a="http://schemas.openxmlformats.org/drawingml/2006/main">
             <a:pPr algn="ctr">
-              <a:defRPr sz="1088" b="1">
+              <a:buNone/>
+              <a:defRPr sz="1200" b="1">
                 <a:solidFill>
                   <a:srgbClr val="8E1F35"/>
                 </a:solidFill>
-                <a:latin typeface="Arial"/>
-                <a:ea typeface="Arial"/>
-                <a:cs typeface="Arial"/>
-              </a:defRPr>
-            </a:pPr>
-            <a:r>
-              <a:rPr sz="1088" b="1">
+                <a:latin typeface="Times New Roman"/>
+                <a:ea typeface="Times New Roman"/>
+                <a:cs typeface="Times New Roman"/>
+              </a:defRPr>
+            </a:pPr>
+            <a:r>
+              <a:rPr sz="1200" b="1">
                 <a:solidFill>
                   <a:srgbClr val="8E1F35"/>
                 </a:solidFill>
-                <a:latin typeface="Arial"/>
-                <a:ea typeface="Arial"/>
-                <a:cs typeface="Arial"/>
-              </a:rPr>
-              <a:t>TRAINING STABILITY - 45 EPOCHS</a:t>
+                <a:latin typeface="Times New Roman"/>
+                <a:ea typeface="Times New Roman"/>
+                <a:cs typeface="Times New Roman"/>
+              </a:rPr>
+              <a:t>VISUAL EVIDENCE</a:t>
             </a:r>
           </a:p>
         </p:txBody>
@@ -8200,13 +8517,13 @@
           <p:nvPr/>
         </p:nvPicPr>
         <p:blipFill>
-          <a:blip xmlns:r="http://schemas.openxmlformats.org/officeDocument/2006/relationships" xmlns:a="http://schemas.openxmlformats.org/drawingml/2006/main" r:embed="Rc56cd6f06e7943e8"/>
+          <a:blip xmlns:r="http://schemas.openxmlformats.org/officeDocument/2006/relationships" xmlns:a="http://schemas.openxmlformats.org/drawingml/2006/main" r:embed="R880bcb4fbc724c37"/>
           <a:stretch xmlns:a="http://schemas.openxmlformats.org/drawingml/2006/main"/>
         </p:blipFill>
         <p:spPr>
           <a:xfrm xmlns:a="http://schemas.openxmlformats.org/drawingml/2006/main">
-            <a:off x="4838700" y="10572750"/>
-            <a:ext cx="4838700" cy="2419350"/>
+            <a:off x="6877050" y="3690938"/>
+            <a:ext cx="2971800" cy="5200650"/>
           </a:xfrm>
           <a:prstGeom xmlns:a="http://schemas.openxmlformats.org/drawingml/2006/main" prst="rect">
             <a:avLst/>
@@ -8229,12 +8546,12 @@
         </p:nvSpPr>
         <p:spPr>
           <a:xfrm xmlns:a="http://schemas.openxmlformats.org/drawingml/2006/main">
-            <a:off x="4667250" y="8620125"/>
-            <a:ext cx="5181600" cy="1524000"/>
+            <a:off x="3562350" y="8353425"/>
+            <a:ext cx="3124200" cy="2667000"/>
           </a:xfrm>
           <a:prstGeom xmlns:a="http://schemas.openxmlformats.org/drawingml/2006/main" prst="roundRect">
             <a:avLst>
-              <a:gd name="adj" fmla="val 6875"/>
+              <a:gd name="adj" fmla="val 3571"/>
             </a:avLst>
           </a:prstGeom>
           <a:solidFill xmlns:a="http://schemas.openxmlformats.org/drawingml/2006/main">
@@ -8248,7 +8565,7 @@
           </a:ln>
         </p:spPr>
         <p:txBody>
-          <a:bodyPr xmlns:a="http://schemas.openxmlformats.org/drawingml/2006/main" wrap="square" lIns="114300" tIns="76200" rIns="114300" bIns="76200" anchor="ctr">
+          <a:bodyPr xmlns:a="http://schemas.openxmlformats.org/drawingml/2006/main" wrap="square" lIns="95250" tIns="66675" rIns="95250" bIns="66675" anchor="ctr">
             <a:noAutofit/>
           </a:bodyPr>
           <a:lstStyle xmlns:a="http://schemas.openxmlformats.org/drawingml/2006/main"/>
@@ -8258,37 +8575,26 @@
                 <a:spcPct val="105000"/>
               </a:lnSpc>
               <a:buNone/>
-              <a:defRPr sz="1065">
-                <a:solidFill>
-                  <a:srgbClr val="34424F"/>
-                </a:solidFill>
-                <a:latin typeface="Arial"/>
-                <a:ea typeface="Arial"/>
-                <a:cs typeface="Arial"/>
-              </a:defRPr>
-            </a:pPr>
-            <a:r>
-              <a:rPr sz="1065" b="1">
+              <a:defRPr sz="1125">
+                <a:solidFill>
+                  <a:srgbClr val="34424F"/>
+                </a:solidFill>
+                <a:latin typeface="Times New Roman"/>
+                <a:ea typeface="Times New Roman"/>
+                <a:cs typeface="Times New Roman"/>
+              </a:defRPr>
+            </a:pPr>
+            <a:r>
+              <a:rPr sz="1125" b="1">
                 <a:solidFill>
                   <a:srgbClr val="8E1F35"/>
                 </a:solidFill>
-                <a:latin typeface="Arial"/>
-                <a:ea typeface="Arial"/>
-                <a:cs typeface="Arial"/>
+                <a:latin typeface="Times New Roman"/>
+                <a:ea typeface="Times New Roman"/>
+                <a:cs typeface="Times New Roman"/>
               </a:rPr>
               <a:t>INDEPENDENT TEST BY CLASS</a:t>
             </a:r>
-            <a:r>
-              <a:rPr sz="1065" b="1">
-                <a:solidFill>
-                  <a:srgbClr val="34424F"/>
-                </a:solidFill>
-                <a:latin typeface="Arial"/>
-                <a:ea typeface="Arial"/>
-                <a:cs typeface="Arial"/>
-              </a:rPr>
-              <a:t>  |  188 images · 171 objects · 11.3 ms/image at batch 8</a:t>
-            </a:r>
           </a:p>
           <a:p xmlns:a="http://schemas.openxmlformats.org/drawingml/2006/main">
             <a:pPr algn="l">
@@ -8296,25 +8602,25 @@
                 <a:spcPct val="105000"/>
               </a:lnSpc>
               <a:buNone/>
-              <a:defRPr sz="1065">
-                <a:solidFill>
-                  <a:srgbClr val="34424F"/>
-                </a:solidFill>
-                <a:latin typeface="Arial"/>
-                <a:ea typeface="Arial"/>
-                <a:cs typeface="Arial"/>
-              </a:defRPr>
-            </a:pPr>
-            <a:r>
-              <a:rPr sz="1065" b="1">
-                <a:solidFill>
-                  <a:srgbClr val="34424F"/>
-                </a:solidFill>
-                <a:latin typeface="Arial"/>
-                <a:ea typeface="Arial"/>
-                <a:cs typeface="Arial"/>
-              </a:rPr>
-              <a:t>CIGARETTE  n=82  |  P .794  |  R .634  |  AP50 .717  |  AP50-95 .404</a:t>
+              <a:defRPr sz="1125">
+                <a:solidFill>
+                  <a:srgbClr val="34424F"/>
+                </a:solidFill>
+                <a:latin typeface="Times New Roman"/>
+                <a:ea typeface="Times New Roman"/>
+                <a:cs typeface="Times New Roman"/>
+              </a:defRPr>
+            </a:pPr>
+            <a:r>
+              <a:rPr sz="1125" b="1">
+                <a:solidFill>
+                  <a:srgbClr val="34424F"/>
+                </a:solidFill>
+                <a:latin typeface="Times New Roman"/>
+                <a:ea typeface="Times New Roman"/>
+                <a:cs typeface="Times New Roman"/>
+              </a:rPr>
+              <a:t>188 images · 171 objects · 11.3 ms/image</a:t>
             </a:r>
           </a:p>
           <a:p xmlns:a="http://schemas.openxmlformats.org/drawingml/2006/main">
@@ -8323,25 +8629,36 @@
                 <a:spcPct val="105000"/>
               </a:lnSpc>
               <a:buNone/>
-              <a:defRPr sz="1065">
-                <a:solidFill>
-                  <a:srgbClr val="34424F"/>
-                </a:solidFill>
-                <a:latin typeface="Arial"/>
-                <a:ea typeface="Arial"/>
-                <a:cs typeface="Arial"/>
-              </a:defRPr>
-            </a:pPr>
-            <a:r>
-              <a:rPr sz="1065" b="1">
-                <a:solidFill>
-                  <a:srgbClr val="34424F"/>
-                </a:solidFill>
-                <a:latin typeface="Arial"/>
-                <a:ea typeface="Arial"/>
-                <a:cs typeface="Arial"/>
-              </a:rPr>
-              <a:t>FLAME       n=50  |  P .812  |  R .740  |  AP50 .763  |  AP50-95 .360</a:t>
+              <a:defRPr sz="1125">
+                <a:solidFill>
+                  <a:srgbClr val="34424F"/>
+                </a:solidFill>
+                <a:latin typeface="Times New Roman"/>
+                <a:ea typeface="Times New Roman"/>
+                <a:cs typeface="Times New Roman"/>
+              </a:defRPr>
+            </a:pPr>
+            <a:r>
+              <a:rPr sz="1125" b="1">
+                <a:solidFill>
+                  <a:srgbClr val="34424F"/>
+                </a:solidFill>
+                <a:latin typeface="Times New Roman"/>
+                <a:ea typeface="Times New Roman"/>
+                <a:cs typeface="Times New Roman"/>
+              </a:rPr>
+              <a:t>CIGARETTE n=82</a:t>
+            </a:r>
+            <a:r>
+              <a:rPr sz="1125" b="1">
+                <a:solidFill>
+                  <a:srgbClr val="34424F"/>
+                </a:solidFill>
+                <a:latin typeface="Times New Roman"/>
+                <a:ea typeface="Times New Roman"/>
+                <a:cs typeface="Times New Roman"/>
+              </a:rPr>
+              <a:t>  |  P .794  |  R .634</a:t>
             </a:r>
           </a:p>
           <a:p xmlns:a="http://schemas.openxmlformats.org/drawingml/2006/main">
@@ -8350,36 +8667,25 @@
                 <a:spcPct val="105000"/>
               </a:lnSpc>
               <a:buNone/>
-              <a:defRPr sz="1065">
-                <a:solidFill>
-                  <a:srgbClr val="34424F"/>
-                </a:solidFill>
-                <a:latin typeface="Arial"/>
-                <a:ea typeface="Arial"/>
-                <a:cs typeface="Arial"/>
-              </a:defRPr>
-            </a:pPr>
-            <a:r>
-              <a:rPr sz="1065" b="1">
-                <a:solidFill>
-                  <a:srgbClr val="34424F"/>
-                </a:solidFill>
-                <a:latin typeface="Arial"/>
-                <a:ea typeface="Arial"/>
-                <a:cs typeface="Arial"/>
-              </a:rPr>
-              <a:t>SMOKE</a:t>
-            </a:r>
-            <a:r>
-              <a:rPr sz="1065" b="1">
-                <a:solidFill>
-                  <a:srgbClr val="34424F"/>
-                </a:solidFill>
-                <a:latin typeface="Arial"/>
-                <a:ea typeface="Arial"/>
-                <a:cs typeface="Arial"/>
-              </a:rPr>
-              <a:t>       n=39  |  P .919  |  R .667  |  AP50 .786  |  AP50-95 .595</a:t>
+              <a:defRPr sz="1125">
+                <a:solidFill>
+                  <a:srgbClr val="34424F"/>
+                </a:solidFill>
+                <a:latin typeface="Times New Roman"/>
+                <a:ea typeface="Times New Roman"/>
+                <a:cs typeface="Times New Roman"/>
+              </a:defRPr>
+            </a:pPr>
+            <a:r>
+              <a:rPr sz="1125" b="1">
+                <a:solidFill>
+                  <a:srgbClr val="34424F"/>
+                </a:solidFill>
+                <a:latin typeface="Times New Roman"/>
+                <a:ea typeface="Times New Roman"/>
+                <a:cs typeface="Times New Roman"/>
+              </a:rPr>
+              <a:t>AP50 .717  |  AP50–95 .404</a:t>
             </a:r>
           </a:p>
           <a:p xmlns:a="http://schemas.openxmlformats.org/drawingml/2006/main">
@@ -8388,36 +8694,263 @@
                 <a:spcPct val="105000"/>
               </a:lnSpc>
               <a:buNone/>
-              <a:defRPr sz="1065">
-                <a:solidFill>
-                  <a:srgbClr val="34424F"/>
-                </a:solidFill>
-                <a:latin typeface="Arial"/>
-                <a:ea typeface="Arial"/>
-                <a:cs typeface="Arial"/>
-              </a:defRPr>
-            </a:pPr>
-            <a:r>
-              <a:rPr sz="1065" b="1">
-                <a:solidFill>
-                  <a:srgbClr val="34424F"/>
-                </a:solidFill>
-                <a:latin typeface="Arial"/>
-                <a:ea typeface="Arial"/>
-                <a:cs typeface="Arial"/>
-              </a:rPr>
-              <a:t>Overall improvement vs legacy clean test</a:t>
-            </a:r>
-            <a:r>
-              <a:rPr sz="1065" b="1">
-                <a:solidFill>
-                  <a:srgbClr val="34424F"/>
-                </a:solidFill>
-                <a:latin typeface="Arial"/>
-                <a:ea typeface="Arial"/>
-                <a:cs typeface="Arial"/>
-              </a:rPr>
-              <a:t>:  +.380 P  |  +.575 R  |  +.671 AP50  |  +.421 AP50-95</a:t>
+              <a:defRPr sz="1275">
+                <a:solidFill>
+                  <a:srgbClr val="1F2428"/>
+                </a:solidFill>
+                <a:latin typeface="Times New Roman"/>
+                <a:ea typeface="Times New Roman"/>
+                <a:cs typeface="Times New Roman"/>
+              </a:defRPr>
+            </a:pPr>
+            <a:r>
+              <a:rPr sz="1275" b="1">
+                <a:solidFill>
+                  <a:srgbClr val="1F2428"/>
+                </a:solidFill>
+                <a:latin typeface="Times New Roman"/>
+                <a:ea typeface="Times New Roman"/>
+                <a:cs typeface="Times New Roman"/>
+              </a:rPr>
+              <a:t/>
+            </a:r>
+          </a:p>
+          <a:p xmlns:a="http://schemas.openxmlformats.org/drawingml/2006/main">
+            <a:pPr algn="l">
+              <a:lnSpc>
+                <a:spcPct val="105000"/>
+              </a:lnSpc>
+              <a:buNone/>
+              <a:defRPr sz="1125">
+                <a:solidFill>
+                  <a:srgbClr val="34424F"/>
+                </a:solidFill>
+                <a:latin typeface="Times New Roman"/>
+                <a:ea typeface="Times New Roman"/>
+                <a:cs typeface="Times New Roman"/>
+              </a:defRPr>
+            </a:pPr>
+            <a:r>
+              <a:rPr sz="1125" b="1">
+                <a:solidFill>
+                  <a:srgbClr val="34424F"/>
+                </a:solidFill>
+                <a:latin typeface="Times New Roman"/>
+                <a:ea typeface="Times New Roman"/>
+                <a:cs typeface="Times New Roman"/>
+              </a:rPr>
+              <a:t>FLAME n=50</a:t>
+            </a:r>
+            <a:r>
+              <a:rPr sz="1125" b="1">
+                <a:solidFill>
+                  <a:srgbClr val="34424F"/>
+                </a:solidFill>
+                <a:latin typeface="Times New Roman"/>
+                <a:ea typeface="Times New Roman"/>
+                <a:cs typeface="Times New Roman"/>
+              </a:rPr>
+              <a:t>  |  P .812  |  R .740</a:t>
+            </a:r>
+          </a:p>
+          <a:p xmlns:a="http://schemas.openxmlformats.org/drawingml/2006/main">
+            <a:pPr algn="l">
+              <a:lnSpc>
+                <a:spcPct val="105000"/>
+              </a:lnSpc>
+              <a:buNone/>
+              <a:defRPr sz="1125">
+                <a:solidFill>
+                  <a:srgbClr val="34424F"/>
+                </a:solidFill>
+                <a:latin typeface="Times New Roman"/>
+                <a:ea typeface="Times New Roman"/>
+                <a:cs typeface="Times New Roman"/>
+              </a:defRPr>
+            </a:pPr>
+            <a:r>
+              <a:rPr sz="1125" b="1">
+                <a:solidFill>
+                  <a:srgbClr val="34424F"/>
+                </a:solidFill>
+                <a:latin typeface="Times New Roman"/>
+                <a:ea typeface="Times New Roman"/>
+                <a:cs typeface="Times New Roman"/>
+              </a:rPr>
+              <a:t>AP50 .763  |  AP50–95 .360</a:t>
+            </a:r>
+          </a:p>
+          <a:p xmlns:a="http://schemas.openxmlformats.org/drawingml/2006/main">
+            <a:pPr algn="l">
+              <a:lnSpc>
+                <a:spcPct val="105000"/>
+              </a:lnSpc>
+              <a:buNone/>
+              <a:defRPr sz="1275">
+                <a:solidFill>
+                  <a:srgbClr val="1F2428"/>
+                </a:solidFill>
+                <a:latin typeface="Times New Roman"/>
+                <a:ea typeface="Times New Roman"/>
+                <a:cs typeface="Times New Roman"/>
+              </a:defRPr>
+            </a:pPr>
+            <a:r>
+              <a:rPr sz="1275" b="1">
+                <a:solidFill>
+                  <a:srgbClr val="1F2428"/>
+                </a:solidFill>
+                <a:latin typeface="Times New Roman"/>
+                <a:ea typeface="Times New Roman"/>
+                <a:cs typeface="Times New Roman"/>
+              </a:rPr>
+              <a:t/>
+            </a:r>
+          </a:p>
+          <a:p xmlns:a="http://schemas.openxmlformats.org/drawingml/2006/main">
+            <a:pPr algn="l">
+              <a:lnSpc>
+                <a:spcPct val="105000"/>
+              </a:lnSpc>
+              <a:buNone/>
+              <a:defRPr sz="1125">
+                <a:solidFill>
+                  <a:srgbClr val="34424F"/>
+                </a:solidFill>
+                <a:latin typeface="Times New Roman"/>
+                <a:ea typeface="Times New Roman"/>
+                <a:cs typeface="Times New Roman"/>
+              </a:defRPr>
+            </a:pPr>
+            <a:r>
+              <a:rPr sz="1125" b="1">
+                <a:solidFill>
+                  <a:srgbClr val="34424F"/>
+                </a:solidFill>
+                <a:latin typeface="Times New Roman"/>
+                <a:ea typeface="Times New Roman"/>
+                <a:cs typeface="Times New Roman"/>
+              </a:rPr>
+              <a:t>SMOKE n=39</a:t>
+            </a:r>
+            <a:r>
+              <a:rPr sz="1125" b="1">
+                <a:solidFill>
+                  <a:srgbClr val="34424F"/>
+                </a:solidFill>
+                <a:latin typeface="Times New Roman"/>
+                <a:ea typeface="Times New Roman"/>
+                <a:cs typeface="Times New Roman"/>
+              </a:rPr>
+              <a:t>  |  P .919  |  R .667</a:t>
+            </a:r>
+          </a:p>
+          <a:p xmlns:a="http://schemas.openxmlformats.org/drawingml/2006/main">
+            <a:pPr algn="l">
+              <a:lnSpc>
+                <a:spcPct val="105000"/>
+              </a:lnSpc>
+              <a:buNone/>
+              <a:defRPr sz="1125">
+                <a:solidFill>
+                  <a:srgbClr val="34424F"/>
+                </a:solidFill>
+                <a:latin typeface="Times New Roman"/>
+                <a:ea typeface="Times New Roman"/>
+                <a:cs typeface="Times New Roman"/>
+              </a:defRPr>
+            </a:pPr>
+            <a:r>
+              <a:rPr sz="1125" b="1">
+                <a:solidFill>
+                  <a:srgbClr val="34424F"/>
+                </a:solidFill>
+                <a:latin typeface="Times New Roman"/>
+                <a:ea typeface="Times New Roman"/>
+                <a:cs typeface="Times New Roman"/>
+              </a:rPr>
+              <a:t>AP50 .786  |  AP50–95 .595</a:t>
+            </a:r>
+          </a:p>
+          <a:p xmlns:a="http://schemas.openxmlformats.org/drawingml/2006/main">
+            <a:pPr algn="l">
+              <a:lnSpc>
+                <a:spcPct val="105000"/>
+              </a:lnSpc>
+              <a:buNone/>
+              <a:defRPr sz="1275">
+                <a:solidFill>
+                  <a:srgbClr val="1F2428"/>
+                </a:solidFill>
+                <a:latin typeface="Times New Roman"/>
+                <a:ea typeface="Times New Roman"/>
+                <a:cs typeface="Times New Roman"/>
+              </a:defRPr>
+            </a:pPr>
+            <a:r>
+              <a:rPr sz="1275" b="1">
+                <a:solidFill>
+                  <a:srgbClr val="1F2428"/>
+                </a:solidFill>
+                <a:latin typeface="Times New Roman"/>
+                <a:ea typeface="Times New Roman"/>
+                <a:cs typeface="Times New Roman"/>
+              </a:rPr>
+              <a:t/>
+            </a:r>
+          </a:p>
+          <a:p xmlns:a="http://schemas.openxmlformats.org/drawingml/2006/main">
+            <a:pPr algn="l">
+              <a:lnSpc>
+                <a:spcPct val="105000"/>
+              </a:lnSpc>
+              <a:buNone/>
+              <a:defRPr sz="1125">
+                <a:solidFill>
+                  <a:srgbClr val="34424F"/>
+                </a:solidFill>
+                <a:latin typeface="Times New Roman"/>
+                <a:ea typeface="Times New Roman"/>
+                <a:cs typeface="Times New Roman"/>
+              </a:defRPr>
+            </a:pPr>
+            <a:r>
+              <a:rPr sz="1125" b="1">
+                <a:solidFill>
+                  <a:srgbClr val="8E1F35"/>
+                </a:solidFill>
+                <a:latin typeface="Times New Roman"/>
+                <a:ea typeface="Times New Roman"/>
+                <a:cs typeface="Times New Roman"/>
+              </a:rPr>
+              <a:t>Δ VS LEGACY CLEAN TEST</a:t>
+            </a:r>
+          </a:p>
+          <a:p xmlns:a="http://schemas.openxmlformats.org/drawingml/2006/main">
+            <a:pPr algn="l">
+              <a:lnSpc>
+                <a:spcPct val="105000"/>
+              </a:lnSpc>
+              <a:buNone/>
+              <a:defRPr sz="1125">
+                <a:solidFill>
+                  <a:srgbClr val="34424F"/>
+                </a:solidFill>
+                <a:latin typeface="Times New Roman"/>
+                <a:ea typeface="Times New Roman"/>
+                <a:cs typeface="Times New Roman"/>
+              </a:defRPr>
+            </a:pPr>
+            <a:r>
+              <a:rPr sz="1125" b="1">
+                <a:solidFill>
+                  <a:srgbClr val="34424F"/>
+                </a:solidFill>
+                <a:latin typeface="Times New Roman"/>
+                <a:ea typeface="Times New Roman"/>
+                <a:cs typeface="Times New Roman"/>
+              </a:rPr>
+              <a:t>P +.380  |  R +.575  |  AP50 +.671  |  AP50–95 +.421</a:t>
             </a:r>
           </a:p>
         </p:txBody>
@@ -8438,8 +8971,8 @@
         </p:nvSpPr>
         <p:spPr>
           <a:xfrm xmlns:a="http://schemas.openxmlformats.org/drawingml/2006/main">
-            <a:off x="4667250" y="13258800"/>
-            <a:ext cx="5181600" cy="323850"/>
+            <a:off x="3562350" y="11144250"/>
+            <a:ext cx="3124200" cy="323850"/>
           </a:xfrm>
           <a:prstGeom xmlns:a="http://schemas.openxmlformats.org/drawingml/2006/main" prst="rect">
             <a:avLst/>
@@ -8461,23 +8994,23 @@
                 <a:spcPct val="108000"/>
               </a:lnSpc>
               <a:buNone/>
-              <a:defRPr sz="1875" b="1" i="0">
+              <a:defRPr sz="2030" b="1" i="0">
                 <a:solidFill>
                   <a:srgbClr val="8E1F35"/>
                 </a:solidFill>
-                <a:latin typeface="Arial"/>
-                <a:ea typeface="Arial"/>
-                <a:cs typeface="Arial"/>
-              </a:defRPr>
-            </a:pPr>
-            <a:r>
-              <a:rPr sz="1875" b="1" i="0">
+                <a:latin typeface="Times New Roman"/>
+                <a:ea typeface="Times New Roman"/>
+                <a:cs typeface="Times New Roman"/>
+              </a:defRPr>
+            </a:pPr>
+            <a:r>
+              <a:rPr sz="2030" b="1" i="0">
                 <a:solidFill>
                   <a:srgbClr val="8E1F35"/>
                 </a:solidFill>
-                <a:latin typeface="Arial"/>
-                <a:ea typeface="Arial"/>
-                <a:cs typeface="Arial"/>
+                <a:latin typeface="Times New Roman"/>
+                <a:ea typeface="Times New Roman"/>
+                <a:cs typeface="Times New Roman"/>
               </a:rPr>
               <a:t>V. Conclusion</a:t>
             </a:r>
@@ -8500,8 +9033,8 @@
         </p:nvSpPr>
         <p:spPr>
           <a:xfrm xmlns:a="http://schemas.openxmlformats.org/drawingml/2006/main">
-            <a:off x="4667250" y="13601700"/>
-            <a:ext cx="5181600" cy="0"/>
+            <a:off x="3562350" y="11487150"/>
+            <a:ext cx="3124200" cy="0"/>
           </a:xfrm>
           <a:prstGeom xmlns:a="http://schemas.openxmlformats.org/drawingml/2006/main" prst="line">
             <a:avLst/>
@@ -8531,8 +9064,469 @@
         </p:nvSpPr>
         <p:spPr>
           <a:xfrm xmlns:a="http://schemas.openxmlformats.org/drawingml/2006/main">
-            <a:off x="4724400" y="13696950"/>
-            <a:ext cx="5067300" cy="1676400"/>
+            <a:off x="3562350" y="11572875"/>
+            <a:ext cx="3124200" cy="5753100"/>
+          </a:xfrm>
+          <a:prstGeom xmlns:a="http://schemas.openxmlformats.org/drawingml/2006/main" prst="roundRect">
+            <a:avLst>
+              <a:gd name="adj" fmla="val 3049"/>
+            </a:avLst>
+          </a:prstGeom>
+          <a:solidFill xmlns:a="http://schemas.openxmlformats.org/drawingml/2006/main">
+            <a:srgbClr val="FFFFFF"/>
+          </a:solidFill>
+          <a:ln xmlns:a="http://schemas.openxmlformats.org/drawingml/2006/main" w="9525">
+            <a:solidFill>
+              <a:srgbClr val="D6E0E4"/>
+            </a:solidFill>
+            <a:prstDash val="solid"/>
+          </a:ln>
+        </p:spPr>
+        <p:txBody>
+          <a:bodyPr xmlns:a="http://schemas.openxmlformats.org/drawingml/2006/main" wrap="square" lIns="76200" tIns="66675" rIns="76200" bIns="66675" anchor="t">
+            <a:noAutofit/>
+          </a:bodyPr>
+          <a:lstStyle xmlns:a="http://schemas.openxmlformats.org/drawingml/2006/main"/>
+          <a:p xmlns:a="http://schemas.openxmlformats.org/drawingml/2006/main">
+            <a:pPr marL="18" indent="-10" algn="l">
+              <a:lnSpc>
+                <a:spcPct val="110000"/>
+              </a:lnSpc>
+              <a:spcAft>
+                <a:spcPts val="7"/>
+              </a:spcAft>
+              <a:buNone/>
+              <a:defRPr sz="1215">
+                <a:solidFill>
+                  <a:srgbClr val="34424F"/>
+                </a:solidFill>
+                <a:latin typeface="Times New Roman"/>
+                <a:ea typeface="Times New Roman"/>
+                <a:cs typeface="Times New Roman"/>
+              </a:defRPr>
+            </a:pPr>
+            <a:r>
+              <a:rPr sz="1215" b="1">
+                <a:solidFill>
+                  <a:srgbClr val="8E1F35"/>
+                </a:solidFill>
+                <a:latin typeface="Times New Roman"/>
+                <a:ea typeface="Times New Roman"/>
+                <a:cs typeface="Times New Roman"/>
+              </a:rPr>
+              <a:t>WHAT CHANGED</a:t>
+            </a:r>
+          </a:p>
+          <a:p xmlns:a="http://schemas.openxmlformats.org/drawingml/2006/main">
+            <a:pPr marL="18" indent="-10" algn="l">
+              <a:lnSpc>
+                <a:spcPct val="110000"/>
+              </a:lnSpc>
+              <a:spcAft>
+                <a:spcPts val="7"/>
+              </a:spcAft>
+              <a:buNone/>
+              <a:defRPr sz="1215">
+                <a:solidFill>
+                  <a:srgbClr val="34424F"/>
+                </a:solidFill>
+                <a:latin typeface="Times New Roman"/>
+                <a:ea typeface="Times New Roman"/>
+                <a:cs typeface="Times New Roman"/>
+              </a:defRPr>
+            </a:pPr>
+            <a:r>
+              <a:rPr sz="1215">
+                <a:solidFill>
+                  <a:srgbClr val="34424F"/>
+                </a:solidFill>
+                <a:latin typeface="Times New Roman"/>
+                <a:ea typeface="Times New Roman"/>
+                <a:cs typeface="Times New Roman"/>
+              </a:rPr>
+              <a:t>• Leakage auditing changed the conclusion: legacy AP50 fell from 0.889 (old validation) to 0.084 on the independent clean test.</a:t>
+            </a:r>
+          </a:p>
+          <a:p xmlns:a="http://schemas.openxmlformats.org/drawingml/2006/main">
+            <a:pPr marL="18" indent="-10" algn="l">
+              <a:lnSpc>
+                <a:spcPct val="110000"/>
+              </a:lnSpc>
+              <a:spcAft>
+                <a:spcPts val="7"/>
+              </a:spcAft>
+              <a:buNone/>
+              <a:defRPr sz="1275">
+                <a:solidFill>
+                  <a:srgbClr val="1F2428"/>
+                </a:solidFill>
+                <a:latin typeface="Times New Roman"/>
+                <a:ea typeface="Times New Roman"/>
+                <a:cs typeface="Times New Roman"/>
+              </a:defRPr>
+            </a:pPr>
+            <a:r>
+              <a:rPr sz="1275">
+                <a:solidFill>
+                  <a:srgbClr val="1F2428"/>
+                </a:solidFill>
+                <a:latin typeface="Times New Roman"/>
+                <a:ea typeface="Times New Roman"/>
+                <a:cs typeface="Times New Roman"/>
+              </a:rPr>
+              <a:t/>
+            </a:r>
+          </a:p>
+          <a:p xmlns:a="http://schemas.openxmlformats.org/drawingml/2006/main">
+            <a:pPr marL="18" indent="-10" algn="l">
+              <a:lnSpc>
+                <a:spcPct val="110000"/>
+              </a:lnSpc>
+              <a:spcAft>
+                <a:spcPts val="7"/>
+              </a:spcAft>
+              <a:buNone/>
+              <a:defRPr sz="1215">
+                <a:solidFill>
+                  <a:srgbClr val="34424F"/>
+                </a:solidFill>
+                <a:latin typeface="Times New Roman"/>
+                <a:ea typeface="Times New Roman"/>
+                <a:cs typeface="Times New Roman"/>
+              </a:defRPr>
+            </a:pPr>
+            <a:r>
+              <a:rPr sz="1215" b="1">
+                <a:solidFill>
+                  <a:srgbClr val="8E1F35"/>
+                </a:solidFill>
+                <a:latin typeface="Times New Roman"/>
+                <a:ea typeface="Times New Roman"/>
+                <a:cs typeface="Times New Roman"/>
+              </a:rPr>
+              <a:t>WHAT WORKED</a:t>
+            </a:r>
+          </a:p>
+          <a:p xmlns:a="http://schemas.openxmlformats.org/drawingml/2006/main">
+            <a:pPr marL="18" indent="-10" algn="l">
+              <a:lnSpc>
+                <a:spcPct val="110000"/>
+              </a:lnSpc>
+              <a:spcAft>
+                <a:spcPts val="7"/>
+              </a:spcAft>
+              <a:buNone/>
+              <a:defRPr sz="1215">
+                <a:solidFill>
+                  <a:srgbClr val="34424F"/>
+                </a:solidFill>
+                <a:latin typeface="Times New Roman"/>
+                <a:ea typeface="Times New Roman"/>
+                <a:cs typeface="Times New Roman"/>
+              </a:defRPr>
+            </a:pPr>
+            <a:r>
+              <a:rPr sz="1215">
+                <a:solidFill>
+                  <a:srgbClr val="34424F"/>
+                </a:solidFill>
+                <a:latin typeface="Times New Roman"/>
+                <a:ea typeface="Times New Roman"/>
+                <a:cs typeface="Times New Roman"/>
+              </a:rPr>
+              <a:t>• Retraining reached AP50 0.755 and AP50–95 0.453 with no cross-split leakage.</a:t>
+            </a:r>
+          </a:p>
+          <a:p xmlns:a="http://schemas.openxmlformats.org/drawingml/2006/main">
+            <a:pPr marL="18" indent="-10" algn="l">
+              <a:lnSpc>
+                <a:spcPct val="110000"/>
+              </a:lnSpc>
+              <a:spcAft>
+                <a:spcPts val="7"/>
+              </a:spcAft>
+              <a:buNone/>
+              <a:defRPr sz="1215">
+                <a:solidFill>
+                  <a:srgbClr val="34424F"/>
+                </a:solidFill>
+                <a:latin typeface="Times New Roman"/>
+                <a:ea typeface="Times New Roman"/>
+                <a:cs typeface="Times New Roman"/>
+              </a:defRPr>
+            </a:pPr>
+            <a:r>
+              <a:rPr sz="1215">
+                <a:solidFill>
+                  <a:srgbClr val="34424F"/>
+                </a:solidFill>
+                <a:latin typeface="Times New Roman"/>
+                <a:ea typeface="Times New Roman"/>
+                <a:cs typeface="Times New Roman"/>
+              </a:rPr>
+              <a:t>• Smoke led precision (0.919) and strict AP (0.595).</a:t>
+            </a:r>
+          </a:p>
+          <a:p xmlns:a="http://schemas.openxmlformats.org/drawingml/2006/main">
+            <a:pPr marL="18" indent="-10" algn="l">
+              <a:lnSpc>
+                <a:spcPct val="110000"/>
+              </a:lnSpc>
+              <a:spcAft>
+                <a:spcPts val="7"/>
+              </a:spcAft>
+              <a:buNone/>
+              <a:defRPr sz="1275">
+                <a:solidFill>
+                  <a:srgbClr val="1F2428"/>
+                </a:solidFill>
+                <a:latin typeface="Times New Roman"/>
+                <a:ea typeface="Times New Roman"/>
+                <a:cs typeface="Times New Roman"/>
+              </a:defRPr>
+            </a:pPr>
+            <a:r>
+              <a:rPr sz="1275">
+                <a:solidFill>
+                  <a:srgbClr val="1F2428"/>
+                </a:solidFill>
+                <a:latin typeface="Times New Roman"/>
+                <a:ea typeface="Times New Roman"/>
+                <a:cs typeface="Times New Roman"/>
+              </a:rPr>
+              <a:t/>
+            </a:r>
+          </a:p>
+          <a:p xmlns:a="http://schemas.openxmlformats.org/drawingml/2006/main">
+            <a:pPr marL="18" indent="-10" algn="l">
+              <a:lnSpc>
+                <a:spcPct val="110000"/>
+              </a:lnSpc>
+              <a:spcAft>
+                <a:spcPts val="7"/>
+              </a:spcAft>
+              <a:buNone/>
+              <a:defRPr sz="1215">
+                <a:solidFill>
+                  <a:srgbClr val="34424F"/>
+                </a:solidFill>
+                <a:latin typeface="Times New Roman"/>
+                <a:ea typeface="Times New Roman"/>
+                <a:cs typeface="Times New Roman"/>
+              </a:defRPr>
+            </a:pPr>
+            <a:r>
+              <a:rPr sz="1215" b="1">
+                <a:solidFill>
+                  <a:srgbClr val="8E1F35"/>
+                </a:solidFill>
+                <a:latin typeface="Times New Roman"/>
+                <a:ea typeface="Times New Roman"/>
+                <a:cs typeface="Times New Roman"/>
+              </a:rPr>
+              <a:t>WHAT REMAINS</a:t>
+            </a:r>
+          </a:p>
+          <a:p xmlns:a="http://schemas.openxmlformats.org/drawingml/2006/main">
+            <a:pPr marL="18" indent="-10" algn="l">
+              <a:lnSpc>
+                <a:spcPct val="110000"/>
+              </a:lnSpc>
+              <a:spcAft>
+                <a:spcPts val="7"/>
+              </a:spcAft>
+              <a:buNone/>
+              <a:defRPr sz="1215">
+                <a:solidFill>
+                  <a:srgbClr val="34424F"/>
+                </a:solidFill>
+                <a:latin typeface="Times New Roman"/>
+                <a:ea typeface="Times New Roman"/>
+                <a:cs typeface="Times New Roman"/>
+              </a:defRPr>
+            </a:pPr>
+            <a:r>
+              <a:rPr sz="1215">
+                <a:solidFill>
+                  <a:srgbClr val="34424F"/>
+                </a:solidFill>
+                <a:latin typeface="Times New Roman"/>
+                <a:ea typeface="Times New Roman"/>
+                <a:cs typeface="Times New Roman"/>
+              </a:rPr>
+              <a:t>• Small/occluded cigarettes limit recall (0.634).</a:t>
+            </a:r>
+          </a:p>
+          <a:p xmlns:a="http://schemas.openxmlformats.org/drawingml/2006/main">
+            <a:pPr marL="18" indent="-10" algn="l">
+              <a:lnSpc>
+                <a:spcPct val="110000"/>
+              </a:lnSpc>
+              <a:spcAft>
+                <a:spcPts val="7"/>
+              </a:spcAft>
+              <a:buNone/>
+              <a:defRPr sz="1215">
+                <a:solidFill>
+                  <a:srgbClr val="34424F"/>
+                </a:solidFill>
+                <a:latin typeface="Times New Roman"/>
+                <a:ea typeface="Times New Roman"/>
+                <a:cs typeface="Times New Roman"/>
+              </a:defRPr>
+            </a:pPr>
+            <a:r>
+              <a:rPr sz="1215">
+                <a:solidFill>
+                  <a:srgbClr val="34424F"/>
+                </a:solidFill>
+                <a:latin typeface="Times New Roman"/>
+                <a:ea typeface="Times New Roman"/>
+                <a:cs typeface="Times New Roman"/>
+              </a:rPr>
+              <a:t>• Flame AP50–95 (0.360) shows localisation error.</a:t>
+            </a:r>
+          </a:p>
+          <a:p xmlns:a="http://schemas.openxmlformats.org/drawingml/2006/main">
+            <a:pPr marL="18" indent="-10" algn="l">
+              <a:lnSpc>
+                <a:spcPct val="110000"/>
+              </a:lnSpc>
+              <a:spcAft>
+                <a:spcPts val="7"/>
+              </a:spcAft>
+              <a:buNone/>
+              <a:defRPr sz="1215">
+                <a:solidFill>
+                  <a:srgbClr val="34424F"/>
+                </a:solidFill>
+                <a:latin typeface="Times New Roman"/>
+                <a:ea typeface="Times New Roman"/>
+                <a:cs typeface="Times New Roman"/>
+              </a:defRPr>
+            </a:pPr>
+            <a:r>
+              <a:rPr sz="1215">
+                <a:solidFill>
+                  <a:srgbClr val="34424F"/>
+                </a:solidFill>
+                <a:latin typeface="Times New Roman"/>
+                <a:ea typeface="Times New Roman"/>
+                <a:cs typeface="Times New Roman"/>
+              </a:rPr>
+              <a:t>• Missed targets dominate cross-class confusion.</a:t>
+            </a:r>
+          </a:p>
+          <a:p xmlns:a="http://schemas.openxmlformats.org/drawingml/2006/main">
+            <a:pPr marL="18" indent="-10" algn="l">
+              <a:lnSpc>
+                <a:spcPct val="110000"/>
+              </a:lnSpc>
+              <a:spcAft>
+                <a:spcPts val="7"/>
+              </a:spcAft>
+              <a:buNone/>
+              <a:defRPr sz="1275">
+                <a:solidFill>
+                  <a:srgbClr val="1F2428"/>
+                </a:solidFill>
+                <a:latin typeface="Times New Roman"/>
+                <a:ea typeface="Times New Roman"/>
+                <a:cs typeface="Times New Roman"/>
+              </a:defRPr>
+            </a:pPr>
+            <a:r>
+              <a:rPr sz="1275">
+                <a:solidFill>
+                  <a:srgbClr val="1F2428"/>
+                </a:solidFill>
+                <a:latin typeface="Times New Roman"/>
+                <a:ea typeface="Times New Roman"/>
+                <a:cs typeface="Times New Roman"/>
+              </a:rPr>
+              <a:t/>
+            </a:r>
+          </a:p>
+          <a:p xmlns:a="http://schemas.openxmlformats.org/drawingml/2006/main">
+            <a:pPr marL="18" indent="-10" algn="l">
+              <a:lnSpc>
+                <a:spcPct val="110000"/>
+              </a:lnSpc>
+              <a:spcAft>
+                <a:spcPts val="7"/>
+              </a:spcAft>
+              <a:buNone/>
+              <a:defRPr sz="1215">
+                <a:solidFill>
+                  <a:srgbClr val="34424F"/>
+                </a:solidFill>
+                <a:latin typeface="Times New Roman"/>
+                <a:ea typeface="Times New Roman"/>
+                <a:cs typeface="Times New Roman"/>
+              </a:defRPr>
+            </a:pPr>
+            <a:r>
+              <a:rPr sz="1215" b="1">
+                <a:solidFill>
+                  <a:srgbClr val="8E1F35"/>
+                </a:solidFill>
+                <a:latin typeface="Times New Roman"/>
+                <a:ea typeface="Times New Roman"/>
+                <a:cs typeface="Times New Roman"/>
+              </a:rPr>
+              <a:t>DECISION</a:t>
+            </a:r>
+          </a:p>
+          <a:p xmlns:a="http://schemas.openxmlformats.org/drawingml/2006/main">
+            <a:pPr marL="18" indent="-10" algn="l">
+              <a:lnSpc>
+                <a:spcPct val="110000"/>
+              </a:lnSpc>
+              <a:spcAft>
+                <a:spcPts val="7"/>
+              </a:spcAft>
+              <a:buNone/>
+              <a:defRPr sz="1215">
+                <a:solidFill>
+                  <a:srgbClr val="34424F"/>
+                </a:solidFill>
+                <a:latin typeface="Times New Roman"/>
+                <a:ea typeface="Times New Roman"/>
+                <a:cs typeface="Times New Roman"/>
+              </a:defRPr>
+            </a:pPr>
+            <a:r>
+              <a:rPr sz="1215">
+                <a:solidFill>
+                  <a:srgbClr val="34424F"/>
+                </a:solidFill>
+                <a:latin typeface="Times New Roman"/>
+                <a:ea typeface="Times New Roman"/>
+                <a:cs typeface="Times New Roman"/>
+              </a:rPr>
+              <a:t>Promising for human-verified early alerts; not ready for safety-critical autonomy until calibrated and validated temporally in unseen buildings.</a:t>
+            </a:r>
+          </a:p>
+        </p:txBody>
+      </p:sp>
+      <p:sp>
+        <p:nvSpPr>
+          <p:cNvPr id="3175" name="section-VI-References">
+            <a:extLst xmlns:a="http://schemas.openxmlformats.org/drawingml/2006/main">
+              <a:ext uri="{FF2B5EF4-FFF2-40B4-BE49-F238E27FC236}">
+                <a16:creationId xmlns:a16="http://schemas.microsoft.com/office/drawing/2014/main" id="{1697A5AD-680A-44F3-A7B6-2D2FB6F30D05}"/>
+              </a:ext>
+            </a:extLst>
+          </p:cNvPr>
+          <p:cNvSpPr>
+            <a:spLocks xmlns:a="http://schemas.openxmlformats.org/drawingml/2006/main" noGrp="1"/>
+          </p:cNvSpPr>
+          <p:nvPr/>
+        </p:nvSpPr>
+        <p:spPr>
+          <a:xfrm xmlns:a="http://schemas.openxmlformats.org/drawingml/2006/main">
+            <a:off x="6819900" y="14001750"/>
+            <a:ext cx="3086100" cy="323850"/>
           </a:xfrm>
           <a:prstGeom xmlns:a="http://schemas.openxmlformats.org/drawingml/2006/main" prst="rect">
             <a:avLst/>
@@ -8544,161 +9538,6 @@
           </a:ln>
         </p:spPr>
         <p:txBody>
-          <a:bodyPr xmlns:a="http://schemas.openxmlformats.org/drawingml/2006/main" wrap="square" lIns="0" tIns="0" rIns="0" bIns="0" anchor="t">
-            <a:noAutofit/>
-          </a:bodyPr>
-          <a:lstStyle xmlns:a="http://schemas.openxmlformats.org/drawingml/2006/main"/>
-          <a:p xmlns:a="http://schemas.openxmlformats.org/drawingml/2006/main">
-            <a:pPr marL="18" indent="-10" algn="l">
-              <a:lnSpc>
-                <a:spcPct val="110000"/>
-              </a:lnSpc>
-              <a:spcAft>
-                <a:spcPts val="7"/>
-              </a:spcAft>
-              <a:buNone/>
-              <a:defRPr sz="1148">
-                <a:solidFill>
-                  <a:srgbClr val="34424F"/>
-                </a:solidFill>
-                <a:latin typeface="Arial"/>
-                <a:ea typeface="Arial"/>
-                <a:cs typeface="Arial"/>
-              </a:defRPr>
-            </a:pPr>
-            <a:r>
-              <a:rPr sz="1148">
-                <a:solidFill>
-                  <a:srgbClr val="34424F"/>
-                </a:solidFill>
-                <a:latin typeface="Arial"/>
-                <a:ea typeface="Arial"/>
-                <a:cs typeface="Arial"/>
-              </a:rPr>
-              <a:t>• Leakage auditing changed the scientific conclusion: the legacy checkpoint fell from an apparent validation mAP@0.5 of 0.889 to 0.084 on the clean test.</a:t>
-            </a:r>
-          </a:p>
-          <a:p xmlns:a="http://schemas.openxmlformats.org/drawingml/2006/main">
-            <a:pPr marL="18" indent="-10" algn="l">
-              <a:lnSpc>
-                <a:spcPct val="110000"/>
-              </a:lnSpc>
-              <a:spcAft>
-                <a:spcPts val="7"/>
-              </a:spcAft>
-              <a:buNone/>
-              <a:defRPr sz="1148">
-                <a:solidFill>
-                  <a:srgbClr val="34424F"/>
-                </a:solidFill>
-                <a:latin typeface="Arial"/>
-                <a:ea typeface="Arial"/>
-                <a:cs typeface="Arial"/>
-              </a:defRPr>
-            </a:pPr>
-            <a:r>
-              <a:rPr sz="1148">
-                <a:solidFill>
-                  <a:srgbClr val="34424F"/>
-                </a:solidFill>
-                <a:latin typeface="Arial"/>
-                <a:ea typeface="Arial"/>
-                <a:cs typeface="Arial"/>
-              </a:rPr>
-              <a:t>• Retraining recovered mAP@0.5 to 0.755 and mAP@0.5:0.95 to 0.453 on a genuinely independent split.</a:t>
-            </a:r>
-          </a:p>
-          <a:p xmlns:a="http://schemas.openxmlformats.org/drawingml/2006/main">
-            <a:pPr marL="18" indent="-10" algn="l">
-              <a:lnSpc>
-                <a:spcPct val="110000"/>
-              </a:lnSpc>
-              <a:spcAft>
-                <a:spcPts val="7"/>
-              </a:spcAft>
-              <a:buNone/>
-              <a:defRPr sz="1148">
-                <a:solidFill>
-                  <a:srgbClr val="34424F"/>
-                </a:solidFill>
-                <a:latin typeface="Arial"/>
-                <a:ea typeface="Arial"/>
-                <a:cs typeface="Arial"/>
-              </a:defRPr>
-            </a:pPr>
-            <a:r>
-              <a:rPr sz="1148">
-                <a:solidFill>
-                  <a:srgbClr val="34424F"/>
-                </a:solidFill>
-                <a:latin typeface="Arial"/>
-                <a:ea typeface="Arial"/>
-                <a:cs typeface="Arial"/>
-              </a:rPr>
-              <a:t>• This equals 85% of the legacy artifact's headline AP50 while providing credible generalisation evidence.</a:t>
-            </a:r>
-          </a:p>
-          <a:p xmlns:a="http://schemas.openxmlformats.org/drawingml/2006/main">
-            <a:pPr marL="18" indent="-10" algn="l">
-              <a:lnSpc>
-                <a:spcPct val="110000"/>
-              </a:lnSpc>
-              <a:spcAft>
-                <a:spcPts val="7"/>
-              </a:spcAft>
-              <a:buNone/>
-              <a:defRPr sz="1148">
-                <a:solidFill>
-                  <a:srgbClr val="34424F"/>
-                </a:solidFill>
-                <a:latin typeface="Arial"/>
-                <a:ea typeface="Arial"/>
-                <a:cs typeface="Arial"/>
-              </a:defRPr>
-            </a:pPr>
-            <a:r>
-              <a:rPr sz="1148">
-                <a:solidFill>
-                  <a:srgbClr val="34424F"/>
-                </a:solidFill>
-                <a:latin typeface="Arial"/>
-                <a:ea typeface="Arial"/>
-                <a:cs typeface="Arial"/>
-              </a:rPr>
-              <a:t>• The detector is promising for human-verified alerts, but missed small/occluded targets and localisation error preclude safety-critical deployment.</a:t>
-            </a:r>
-          </a:p>
-        </p:txBody>
-      </p:sp>
-      <p:sp>
-        <p:nvSpPr>
-          <p:cNvPr id="3175" name="section-VI-References">
-            <a:extLst xmlns:a="http://schemas.openxmlformats.org/drawingml/2006/main">
-              <a:ext uri="{FF2B5EF4-FFF2-40B4-BE49-F238E27FC236}">
-                <a16:creationId xmlns:a16="http://schemas.microsoft.com/office/drawing/2014/main" id="{1697A5AD-680A-44F3-A7B6-2D2FB6F30D05}"/>
-              </a:ext>
-            </a:extLst>
-          </p:cNvPr>
-          <p:cNvSpPr>
-            <a:spLocks xmlns:a="http://schemas.openxmlformats.org/drawingml/2006/main" noGrp="1"/>
-          </p:cNvSpPr>
-          <p:nvPr/>
-        </p:nvSpPr>
-        <p:spPr>
-          <a:xfrm xmlns:a="http://schemas.openxmlformats.org/drawingml/2006/main">
-            <a:off x="4667250" y="15525750"/>
-            <a:ext cx="5181600" cy="323850"/>
-          </a:xfrm>
-          <a:prstGeom xmlns:a="http://schemas.openxmlformats.org/drawingml/2006/main" prst="rect">
-            <a:avLst/>
-          </a:prstGeom>
-          <a:noFill xmlns:a="http://schemas.openxmlformats.org/drawingml/2006/main"/>
-          <a:ln xmlns:a="http://schemas.openxmlformats.org/drawingml/2006/main" w="0">
-            <a:noFill/>
-            <a:prstDash val="solid"/>
-          </a:ln>
-        </p:spPr>
-        <p:txBody>
           <a:bodyPr xmlns:a="http://schemas.openxmlformats.org/drawingml/2006/main" wrap="square" lIns="0" tIns="0" rIns="0" bIns="0" anchor="ctr">
             <a:noAutofit/>
           </a:bodyPr>
@@ -8709,23 +9548,23 @@
                 <a:spcPct val="108000"/>
               </a:lnSpc>
               <a:buNone/>
-              <a:defRPr sz="1875" b="1" i="0">
+              <a:defRPr sz="2030" b="1" i="0">
                 <a:solidFill>
                   <a:srgbClr val="8E1F35"/>
                 </a:solidFill>
-                <a:latin typeface="Arial"/>
-                <a:ea typeface="Arial"/>
-                <a:cs typeface="Arial"/>
-              </a:defRPr>
-            </a:pPr>
-            <a:r>
-              <a:rPr sz="1875" b="1" i="0">
+                <a:latin typeface="Times New Roman"/>
+                <a:ea typeface="Times New Roman"/>
+                <a:cs typeface="Times New Roman"/>
+              </a:defRPr>
+            </a:pPr>
+            <a:r>
+              <a:rPr sz="2030" b="1" i="0">
                 <a:solidFill>
                   <a:srgbClr val="8E1F35"/>
                 </a:solidFill>
-                <a:latin typeface="Arial"/>
-                <a:ea typeface="Arial"/>
-                <a:cs typeface="Arial"/>
+                <a:latin typeface="Times New Roman"/>
+                <a:ea typeface="Times New Roman"/>
+                <a:cs typeface="Times New Roman"/>
               </a:rPr>
               <a:t>VI. References</a:t>
             </a:r>
@@ -8748,8 +9587,8 @@
         </p:nvSpPr>
         <p:spPr>
           <a:xfrm xmlns:a="http://schemas.openxmlformats.org/drawingml/2006/main">
-            <a:off x="4667250" y="15868650"/>
-            <a:ext cx="5181600" cy="0"/>
+            <a:off x="6819900" y="14344650"/>
+            <a:ext cx="3086100" cy="0"/>
           </a:xfrm>
           <a:prstGeom xmlns:a="http://schemas.openxmlformats.org/drawingml/2006/main" prst="line">
             <a:avLst/>
@@ -8779,8 +9618,8 @@
         </p:nvSpPr>
         <p:spPr>
           <a:xfrm xmlns:a="http://schemas.openxmlformats.org/drawingml/2006/main">
-            <a:off x="4724400" y="15963900"/>
-            <a:ext cx="5067300" cy="1428750"/>
+            <a:off x="6819900" y="14420850"/>
+            <a:ext cx="3086100" cy="2905125"/>
           </a:xfrm>
           <a:prstGeom xmlns:a="http://schemas.openxmlformats.org/drawingml/2006/main" prst="rect">
             <a:avLst/>
@@ -8802,23 +9641,23 @@
                 <a:spcPct val="114000"/>
               </a:lnSpc>
               <a:buNone/>
-              <a:defRPr sz="1028" b="0" i="0">
+              <a:defRPr sz="1163" b="0" i="0">
                 <a:solidFill>
                   <a:srgbClr val="65727D"/>
                 </a:solidFill>
-                <a:latin typeface="Arial"/>
-                <a:ea typeface="Arial"/>
-                <a:cs typeface="Arial"/>
-              </a:defRPr>
-            </a:pPr>
-            <a:r>
-              <a:rPr sz="1028" b="0" i="0">
+                <a:latin typeface="Times New Roman"/>
+                <a:ea typeface="Times New Roman"/>
+                <a:cs typeface="Times New Roman"/>
+              </a:defRPr>
+            </a:pPr>
+            <a:r>
+              <a:rPr sz="1163" b="0" i="0">
                 <a:solidFill>
                   <a:srgbClr val="65727D"/>
                 </a:solidFill>
-                <a:latin typeface="Arial"/>
-                <a:ea typeface="Arial"/>
-                <a:cs typeface="Arial"/>
+                <a:latin typeface="Times New Roman"/>
+                <a:ea typeface="Times New Roman"/>
+                <a:cs typeface="Times New Roman"/>
               </a:rPr>
               <a:t>[1] Jocher, G. et al. (2020). ultralytics/yolov5. Zenodo.</a:t>
             </a:r>
@@ -8829,23 +9668,23 @@
                 <a:spcPct val="114000"/>
               </a:lnSpc>
               <a:buNone/>
-              <a:defRPr sz="1028" b="0" i="0">
+              <a:defRPr sz="1163" b="0" i="0">
                 <a:solidFill>
                   <a:srgbClr val="65727D"/>
                 </a:solidFill>
-                <a:latin typeface="Arial"/>
-                <a:ea typeface="Arial"/>
-                <a:cs typeface="Arial"/>
-              </a:defRPr>
-            </a:pPr>
-            <a:r>
-              <a:rPr sz="1028" b="0" i="0">
+                <a:latin typeface="Times New Roman"/>
+                <a:ea typeface="Times New Roman"/>
+                <a:cs typeface="Times New Roman"/>
+              </a:defRPr>
+            </a:pPr>
+            <a:r>
+              <a:rPr sz="1163" b="0" i="0">
                 <a:solidFill>
                   <a:srgbClr val="65727D"/>
                 </a:solidFill>
-                <a:latin typeface="Arial"/>
-                <a:ea typeface="Arial"/>
-                <a:cs typeface="Arial"/>
+                <a:latin typeface="Times New Roman"/>
+                <a:ea typeface="Times New Roman"/>
+                <a:cs typeface="Times New Roman"/>
               </a:rPr>
               <a:t>[2] URIS Progress Report P0053535 (2025).</a:t>
             </a:r>
@@ -8856,25 +9695,25 @@
                 <a:spcPct val="114000"/>
               </a:lnSpc>
               <a:buNone/>
-              <a:defRPr sz="1028" b="0" i="0">
+              <a:defRPr sz="1163" b="0" i="0">
                 <a:solidFill>
                   <a:srgbClr val="65727D"/>
                 </a:solidFill>
-                <a:latin typeface="Arial"/>
-                <a:ea typeface="Arial"/>
-                <a:cs typeface="Arial"/>
-              </a:defRPr>
-            </a:pPr>
-            <a:r>
-              <a:rPr sz="1028" b="0" i="0">
+                <a:latin typeface="Times New Roman"/>
+                <a:ea typeface="Times New Roman"/>
+                <a:cs typeface="Times New Roman"/>
+              </a:defRPr>
+            </a:pPr>
+            <a:r>
+              <a:rPr sz="1163" b="0" i="0">
                 <a:solidFill>
                   <a:srgbClr val="65727D"/>
                 </a:solidFill>
-                <a:latin typeface="Arial"/>
-                <a:ea typeface="Arial"/>
-                <a:cs typeface="Arial"/>
-              </a:rPr>
-              <a:t>[3] Leakage-safe dataset audit and 45-epoch clean experiment (11 Aug 2026).</a:t>
+                <a:latin typeface="Times New Roman"/>
+                <a:ea typeface="Times New Roman"/>
+                <a:cs typeface="Times New Roman"/>
+              </a:rPr>
+              <a:t>[3] Leakage-safe audit and 45-epoch clean experiment (11 Aug 2026).</a:t>
             </a:r>
           </a:p>
           <a:p xmlns:a="http://schemas.openxmlformats.org/drawingml/2006/main">
@@ -8883,25 +9722,25 @@
                 <a:spcPct val="114000"/>
               </a:lnSpc>
               <a:buNone/>
-              <a:defRPr sz="1028" b="0" i="0">
+              <a:defRPr sz="1163" b="0" i="0">
                 <a:solidFill>
                   <a:srgbClr val="65727D"/>
                 </a:solidFill>
-                <a:latin typeface="Arial"/>
-                <a:ea typeface="Arial"/>
-                <a:cs typeface="Arial"/>
-              </a:defRPr>
-            </a:pPr>
-            <a:r>
-              <a:rPr sz="1028" b="0" i="0">
+                <a:latin typeface="Times New Roman"/>
+                <a:ea typeface="Times New Roman"/>
+                <a:cs typeface="Times New Roman"/>
+              </a:defRPr>
+            </a:pPr>
+            <a:r>
+              <a:rPr sz="1163" b="0" i="0">
                 <a:solidFill>
                   <a:srgbClr val="65727D"/>
                 </a:solidFill>
-                <a:latin typeface="Arial"/>
-                <a:ea typeface="Arial"/>
-                <a:cs typeface="Arial"/>
-              </a:rPr>
-              <a:t>[4] Independent clean-test evaluation: baseline_clean_test and full_clean_test.</a:t>
+                <a:latin typeface="Times New Roman"/>
+                <a:ea typeface="Times New Roman"/>
+                <a:cs typeface="Times New Roman"/>
+              </a:rPr>
+              <a:t>[4] Independent evaluations: baseline_clean_test; full_clean_test.</a:t>
             </a:r>
           </a:p>
           <a:p xmlns:a="http://schemas.openxmlformats.org/drawingml/2006/main">
@@ -8910,23 +9749,23 @@
                 <a:spcPct val="114000"/>
               </a:lnSpc>
               <a:buNone/>
-              <a:defRPr sz="1028" b="0" i="0">
+              <a:defRPr sz="1163" b="0" i="0">
                 <a:solidFill>
                   <a:srgbClr val="65727D"/>
                 </a:solidFill>
-                <a:latin typeface="Arial"/>
-                <a:ea typeface="Arial"/>
-                <a:cs typeface="Arial"/>
-              </a:defRPr>
-            </a:pPr>
-            <a:r>
-              <a:rPr sz="1028" b="0" i="0">
+                <a:latin typeface="Times New Roman"/>
+                <a:ea typeface="Times New Roman"/>
+                <a:cs typeface="Times New Roman"/>
+              </a:defRPr>
+            </a:pPr>
+            <a:r>
+              <a:rPr sz="1163" b="0" i="0">
                 <a:solidFill>
                   <a:srgbClr val="65727D"/>
                 </a:solidFill>
-                <a:latin typeface="Arial"/>
-                <a:ea typeface="Arial"/>
-                <a:cs typeface="Arial"/>
+                <a:latin typeface="Times New Roman"/>
+                <a:ea typeface="Times New Roman"/>
+                <a:cs typeface="Times New Roman"/>
               </a:rPr>
               <a:t>[5] github.com/Llleeeo/Smoke-and-Fire-detection-model-and-implementation-</a:t>
             </a:r>
@@ -8937,25 +9776,52 @@
                 <a:spcPct val="114000"/>
               </a:lnSpc>
               <a:buNone/>
-              <a:defRPr sz="1028" b="0" i="0">
+              <a:defRPr sz="1163" b="0" i="0">
+                <a:solidFill>
+                  <a:srgbClr val="1F2428"/>
+                </a:solidFill>
+                <a:latin typeface="Times New Roman"/>
+                <a:ea typeface="Times New Roman"/>
+                <a:cs typeface="Times New Roman"/>
+              </a:defRPr>
+            </a:pPr>
+            <a:r>
+              <a:rPr sz="1163" b="0" i="0">
+                <a:solidFill>
+                  <a:srgbClr val="1F2428"/>
+                </a:solidFill>
+                <a:latin typeface="Times New Roman"/>
+                <a:ea typeface="Times New Roman"/>
+                <a:cs typeface="Times New Roman"/>
+              </a:rPr>
+              <a:t/>
+            </a:r>
+          </a:p>
+          <a:p xmlns:a="http://schemas.openxmlformats.org/drawingml/2006/main">
+            <a:pPr algn="l">
+              <a:lnSpc>
+                <a:spcPct val="114000"/>
+              </a:lnSpc>
+              <a:buNone/>
+              <a:defRPr sz="1163" b="0" i="0">
                 <a:solidFill>
                   <a:srgbClr val="65727D"/>
                 </a:solidFill>
-                <a:latin typeface="Arial"/>
-                <a:ea typeface="Arial"/>
-                <a:cs typeface="Arial"/>
-              </a:defRPr>
-            </a:pPr>
-            <a:r>
-              <a:rPr sz="1028" b="0" i="0">
+                <a:latin typeface="Times New Roman"/>
+                <a:ea typeface="Times New Roman"/>
+                <a:cs typeface="Times New Roman"/>
+              </a:defRPr>
+            </a:pPr>
+            <a:r>
+              <a:rPr sz="1163" b="0" i="0">
                 <a:solidFill>
                   <a:srgbClr val="65727D"/>
                 </a:solidFill>
-                <a:latin typeface="Arial"/>
-                <a:ea typeface="Arial"/>
-                <a:cs typeface="Arial"/>
-              </a:rPr>
-              <a:t>Results are independent-test values unless marked legacy val*.</a:t>
+                <a:latin typeface="Times New Roman"/>
+                <a:ea typeface="Times New Roman"/>
+                <a:cs typeface="Times New Roman"/>
+              </a:rPr>
+              <a:t>Headline results use the independent test unless marked legacy val*. Full provenance is embedded in the PowerPoint notes.</a:t>
             </a:r>
           </a:p>
         </p:txBody>
